--- a/CarRentalPPT.pptx
+++ b/CarRentalPPT.pptx
@@ -13,6 +13,8 @@
     <p:sldId id="261" r:id="rId7"/>
     <p:sldId id="262" r:id="rId8"/>
     <p:sldId id="263" r:id="rId9"/>
+    <p:sldId id="264" r:id="rId10"/>
+    <p:sldId id="265" r:id="rId11"/>
   </p:sldIdLst>
   <p:sldSz cx="12192000" cy="6858000"/>
   <p:notesSz cx="6858000" cy="9144000"/>
@@ -111,6 +113,11 @@
       </a:defRPr>
     </a:lvl9pPr>
   </p:defaultTextStyle>
+  <p:extLst>
+    <p:ext uri="{EFAFB233-063F-42B5-8137-9DF3F51BA10A}">
+      <p15:sldGuideLst xmlns:p15="http://schemas.microsoft.com/office/powerpoint/2012/main"/>
+    </p:ext>
+  </p:extLst>
 </p:presentation>
 </file>
 
@@ -3319,7 +3326,7 @@
 <dgm:dataModel xmlns:dgm="http://schemas.openxmlformats.org/drawingml/2006/diagram" xmlns:a="http://schemas.openxmlformats.org/drawingml/2006/main">
   <dgm:ptLst>
     <dgm:pt modelId="{EBE1269D-F419-4871-A35B-8D86298D50EA}" type="doc">
-      <dgm:prSet loTypeId="urn:microsoft.com/office/officeart/2008/layout/AlternatingHexagons" loCatId="list" qsTypeId="urn:microsoft.com/office/officeart/2005/8/quickstyle/simple1" qsCatId="simple" csTypeId="urn:microsoft.com/office/officeart/2005/8/colors/accent0_3" csCatId="mainScheme"/>
+      <dgm:prSet loTypeId="urn:microsoft.com/office/officeart/2008/layout/CaptionedPictures" loCatId="list" qsTypeId="urn:microsoft.com/office/officeart/2005/8/quickstyle/simple1" qsCatId="simple" csTypeId="urn:microsoft.com/office/officeart/2005/8/colors/accent0_3" csCatId="mainScheme" phldr="1"/>
       <dgm:spPr/>
       <dgm:t>
         <a:bodyPr/>
@@ -3373,7 +3380,7 @@
         <a:lstStyle/>
         <a:p>
           <a:r>
-            <a:rPr lang="en-US"/>
+            <a:rPr lang="en-US" dirty="0"/>
             <a:t>UML Diagram</a:t>
           </a:r>
         </a:p>
@@ -3401,33 +3408,154 @@
         </a:p>
       </dgm:t>
     </dgm:pt>
-    <dgm:pt modelId="{DC7BE218-E49C-D14A-A4DF-840BA1F0DB6F}" type="pres">
+    <dgm:pt modelId="{13134C99-34CD-234A-BBDA-27D03A5AFB46}">
+      <dgm:prSet/>
+      <dgm:spPr/>
+      <dgm:t>
+        <a:bodyPr/>
+        <a:lstStyle/>
+        <a:p>
+          <a:r>
+            <a:rPr lang="en-US" dirty="0"/>
+            <a:t>Sequence Diagram</a:t>
+          </a:r>
+        </a:p>
+      </dgm:t>
+    </dgm:pt>
+    <dgm:pt modelId="{D2D1E4D5-F8B9-4443-98AC-876D28ECAB09}" type="parTrans" cxnId="{FD3C4100-CD4B-BF41-8719-FA173A5D3FF9}">
+      <dgm:prSet/>
+      <dgm:spPr/>
+      <dgm:t>
+        <a:bodyPr/>
+        <a:lstStyle/>
+        <a:p>
+          <a:endParaRPr lang="en-US"/>
+        </a:p>
+      </dgm:t>
+    </dgm:pt>
+    <dgm:pt modelId="{CBA6BD30-3AA3-B741-922F-51BC0A79B6D6}" type="sibTrans" cxnId="{FD3C4100-CD4B-BF41-8719-FA173A5D3FF9}">
+      <dgm:prSet/>
+      <dgm:spPr/>
+      <dgm:t>
+        <a:bodyPr/>
+        <a:lstStyle/>
+        <a:p>
+          <a:endParaRPr lang="en-US"/>
+        </a:p>
+      </dgm:t>
+    </dgm:pt>
+    <dgm:pt modelId="{9BA30DF9-9D28-F842-A030-03F2638ACE66}">
+      <dgm:prSet/>
+      <dgm:spPr/>
+      <dgm:t>
+        <a:bodyPr/>
+        <a:lstStyle/>
+        <a:p>
+          <a:r>
+            <a:rPr lang="en-US" dirty="0"/>
+            <a:t>High Level Architecture</a:t>
+          </a:r>
+        </a:p>
+      </dgm:t>
+    </dgm:pt>
+    <dgm:pt modelId="{D3F94F8D-4342-6544-96E6-12E296F42E31}" type="parTrans" cxnId="{ECBB3182-1DEF-EE46-86E3-4059222F1DA9}">
+      <dgm:prSet/>
+      <dgm:spPr/>
+      <dgm:t>
+        <a:bodyPr/>
+        <a:lstStyle/>
+        <a:p>
+          <a:endParaRPr lang="en-US"/>
+        </a:p>
+      </dgm:t>
+    </dgm:pt>
+    <dgm:pt modelId="{6365164C-9A4F-5945-B763-7D05974505A3}" type="sibTrans" cxnId="{ECBB3182-1DEF-EE46-86E3-4059222F1DA9}">
+      <dgm:prSet/>
+      <dgm:spPr/>
+      <dgm:t>
+        <a:bodyPr/>
+        <a:lstStyle/>
+        <a:p>
+          <a:endParaRPr lang="en-US"/>
+        </a:p>
+      </dgm:t>
+    </dgm:pt>
+    <dgm:pt modelId="{D23ABF72-EDF0-C64A-8CBB-6E6F6B7BEB60}">
+      <dgm:prSet/>
+      <dgm:spPr/>
+      <dgm:t>
+        <a:bodyPr/>
+        <a:lstStyle/>
+        <a:p>
+          <a:endParaRPr lang="en-US" dirty="0"/>
+        </a:p>
+      </dgm:t>
+    </dgm:pt>
+    <dgm:pt modelId="{D435D034-900D-E248-AF44-7719C0D45FEE}" type="parTrans" cxnId="{24F30187-89D4-8D41-8F5E-8C8F64BCF6FA}">
+      <dgm:prSet/>
+      <dgm:spPr/>
+      <dgm:t>
+        <a:bodyPr/>
+        <a:lstStyle/>
+        <a:p>
+          <a:endParaRPr lang="en-US"/>
+        </a:p>
+      </dgm:t>
+    </dgm:pt>
+    <dgm:pt modelId="{6BE09F03-F813-BB45-9152-3E338B101B57}" type="sibTrans" cxnId="{24F30187-89D4-8D41-8F5E-8C8F64BCF6FA}">
+      <dgm:prSet/>
+      <dgm:spPr/>
+      <dgm:t>
+        <a:bodyPr/>
+        <a:lstStyle/>
+        <a:p>
+          <a:endParaRPr lang="en-US"/>
+        </a:p>
+      </dgm:t>
+    </dgm:pt>
+    <dgm:pt modelId="{9F4F91C9-55A6-5C43-B339-D0611FAF0684}" type="pres">
       <dgm:prSet presAssocID="{EBE1269D-F419-4871-A35B-8D86298D50EA}" presName="Name0" presStyleCnt="0">
         <dgm:presLayoutVars>
           <dgm:chMax/>
           <dgm:chPref/>
           <dgm:dir/>
-          <dgm:animLvl val="lvl"/>
         </dgm:presLayoutVars>
       </dgm:prSet>
       <dgm:spPr/>
     </dgm:pt>
-    <dgm:pt modelId="{B6D990A2-0C86-3D4E-9706-99CDB829A164}" type="pres">
-      <dgm:prSet presAssocID="{C36D9BB9-E319-4DD9-BAC6-5C7D85C634F2}" presName="composite" presStyleCnt="0"/>
-      <dgm:spPr/>
-    </dgm:pt>
-    <dgm:pt modelId="{CFC2DF33-135D-614F-B500-1A19C5983E0A}" type="pres">
-      <dgm:prSet presAssocID="{C36D9BB9-E319-4DD9-BAC6-5C7D85C634F2}" presName="Parent1" presStyleLbl="node1" presStyleIdx="0" presStyleCnt="4">
+    <dgm:pt modelId="{C72462CB-815B-154E-98BC-2838743C0C03}" type="pres">
+      <dgm:prSet presAssocID="{C36D9BB9-E319-4DD9-BAC6-5C7D85C634F2}" presName="composite" presStyleCnt="0">
         <dgm:presLayoutVars>
           <dgm:chMax val="1"/>
           <dgm:chPref val="1"/>
-          <dgm:bulletEnabled val="1"/>
         </dgm:presLayoutVars>
       </dgm:prSet>
       <dgm:spPr/>
     </dgm:pt>
-    <dgm:pt modelId="{D574E64A-9673-B94B-BC12-701C142F9A2B}" type="pres">
-      <dgm:prSet presAssocID="{C36D9BB9-E319-4DD9-BAC6-5C7D85C634F2}" presName="Childtext1" presStyleLbl="revTx" presStyleIdx="0" presStyleCnt="2">
+    <dgm:pt modelId="{3B2739A1-F650-2548-BC29-B71106EC9DF3}" type="pres">
+      <dgm:prSet presAssocID="{C36D9BB9-E319-4DD9-BAC6-5C7D85C634F2}" presName="Accent" presStyleLbl="trAlignAcc1" presStyleIdx="0" presStyleCnt="5">
+        <dgm:presLayoutVars>
+          <dgm:chMax val="0"/>
+          <dgm:chPref val="0"/>
+        </dgm:presLayoutVars>
+      </dgm:prSet>
+      <dgm:spPr/>
+    </dgm:pt>
+    <dgm:pt modelId="{BA928CF2-BF28-984C-96A1-B6B5C179FD0C}" type="pres">
+      <dgm:prSet presAssocID="{C36D9BB9-E319-4DD9-BAC6-5C7D85C634F2}" presName="Image" presStyleLbl="alignImgPlace1" presStyleIdx="0" presStyleCnt="5">
+        <dgm:presLayoutVars>
+          <dgm:chMax val="0"/>
+          <dgm:chPref val="0"/>
+        </dgm:presLayoutVars>
+      </dgm:prSet>
+      <dgm:spPr/>
+    </dgm:pt>
+    <dgm:pt modelId="{20185D9C-4BC3-5142-834F-2D258B69322F}" type="pres">
+      <dgm:prSet presAssocID="{C36D9BB9-E319-4DD9-BAC6-5C7D85C634F2}" presName="ChildComposite" presStyleCnt="0"/>
+      <dgm:spPr/>
+    </dgm:pt>
+    <dgm:pt modelId="{45E4CC70-86EF-6248-B3E7-943C7F6B09A8}" type="pres">
+      <dgm:prSet presAssocID="{C36D9BB9-E319-4DD9-BAC6-5C7D85C634F2}" presName="Child" presStyleLbl="node1" presStyleIdx="0" presStyleCnt="0">
         <dgm:presLayoutVars>
           <dgm:chMax val="0"/>
           <dgm:chPref val="0"/>
@@ -3436,38 +3564,53 @@
       </dgm:prSet>
       <dgm:spPr/>
     </dgm:pt>
-    <dgm:pt modelId="{C57BBD7F-6BE1-4845-B03E-0E9FC5A5727A}" type="pres">
-      <dgm:prSet presAssocID="{C36D9BB9-E319-4DD9-BAC6-5C7D85C634F2}" presName="BalanceSpacing" presStyleCnt="0"/>
-      <dgm:spPr/>
-    </dgm:pt>
-    <dgm:pt modelId="{48FF5544-2D10-7C43-9E68-7E8216C15CA3}" type="pres">
-      <dgm:prSet presAssocID="{C36D9BB9-E319-4DD9-BAC6-5C7D85C634F2}" presName="BalanceSpacing1" presStyleCnt="0"/>
-      <dgm:spPr/>
-    </dgm:pt>
-    <dgm:pt modelId="{BF6F1B37-B6EF-644C-8563-53D339B324CF}" type="pres">
-      <dgm:prSet presAssocID="{3DFBAF57-61C6-42EB-A960-BB17BC161795}" presName="Accent1Text" presStyleLbl="node1" presStyleIdx="1" presStyleCnt="4"/>
-      <dgm:spPr/>
-    </dgm:pt>
-    <dgm:pt modelId="{2EB3C97D-80C4-C942-B23A-724FFA293CCB}" type="pres">
-      <dgm:prSet presAssocID="{3DFBAF57-61C6-42EB-A960-BB17BC161795}" presName="spaceBetweenRectangles" presStyleCnt="0"/>
-      <dgm:spPr/>
-    </dgm:pt>
-    <dgm:pt modelId="{51669CFE-A069-7A4B-8101-388C2EC1B929}" type="pres">
-      <dgm:prSet presAssocID="{08AD0689-6745-4D58-8DBE-C5318B852345}" presName="composite" presStyleCnt="0"/>
-      <dgm:spPr/>
-    </dgm:pt>
-    <dgm:pt modelId="{7ADC6D60-6984-934A-82F3-03B7C6EAE1F7}" type="pres">
-      <dgm:prSet presAssocID="{08AD0689-6745-4D58-8DBE-C5318B852345}" presName="Parent1" presStyleLbl="node1" presStyleIdx="2" presStyleCnt="4">
+    <dgm:pt modelId="{17C006A3-EEFA-3A45-88DD-F8407CDFB953}" type="pres">
+      <dgm:prSet presAssocID="{C36D9BB9-E319-4DD9-BAC6-5C7D85C634F2}" presName="Parent" presStyleLbl="revTx" presStyleIdx="0" presStyleCnt="5">
         <dgm:presLayoutVars>
           <dgm:chMax val="1"/>
-          <dgm:chPref val="1"/>
+          <dgm:chPref val="0"/>
           <dgm:bulletEnabled val="1"/>
         </dgm:presLayoutVars>
       </dgm:prSet>
       <dgm:spPr/>
     </dgm:pt>
-    <dgm:pt modelId="{19A1316C-D877-D947-BABA-AA210C2D981A}" type="pres">
-      <dgm:prSet presAssocID="{08AD0689-6745-4D58-8DBE-C5318B852345}" presName="Childtext1" presStyleLbl="revTx" presStyleIdx="1" presStyleCnt="2">
+    <dgm:pt modelId="{B97739F4-2F27-8F43-82F1-96DF796B0F48}" type="pres">
+      <dgm:prSet presAssocID="{3DFBAF57-61C6-42EB-A960-BB17BC161795}" presName="sibTrans" presStyleCnt="0"/>
+      <dgm:spPr/>
+    </dgm:pt>
+    <dgm:pt modelId="{1E337137-E615-5142-8F76-0C74FB75FCB6}" type="pres">
+      <dgm:prSet presAssocID="{08AD0689-6745-4D58-8DBE-C5318B852345}" presName="composite" presStyleCnt="0">
+        <dgm:presLayoutVars>
+          <dgm:chMax val="1"/>
+          <dgm:chPref val="1"/>
+        </dgm:presLayoutVars>
+      </dgm:prSet>
+      <dgm:spPr/>
+    </dgm:pt>
+    <dgm:pt modelId="{06F479F1-3DCA-2B4E-A342-7677D3805194}" type="pres">
+      <dgm:prSet presAssocID="{08AD0689-6745-4D58-8DBE-C5318B852345}" presName="Accent" presStyleLbl="trAlignAcc1" presStyleIdx="1" presStyleCnt="5">
+        <dgm:presLayoutVars>
+          <dgm:chMax val="0"/>
+          <dgm:chPref val="0"/>
+        </dgm:presLayoutVars>
+      </dgm:prSet>
+      <dgm:spPr/>
+    </dgm:pt>
+    <dgm:pt modelId="{3AC27D81-1F71-484D-9F02-355518FDF89C}" type="pres">
+      <dgm:prSet presAssocID="{08AD0689-6745-4D58-8DBE-C5318B852345}" presName="Image" presStyleLbl="alignImgPlace1" presStyleIdx="1" presStyleCnt="5">
+        <dgm:presLayoutVars>
+          <dgm:chMax val="0"/>
+          <dgm:chPref val="0"/>
+        </dgm:presLayoutVars>
+      </dgm:prSet>
+      <dgm:spPr/>
+    </dgm:pt>
+    <dgm:pt modelId="{1B92D5F7-D1DB-C24F-84F3-4D948A6A7190}" type="pres">
+      <dgm:prSet presAssocID="{08AD0689-6745-4D58-8DBE-C5318B852345}" presName="ChildComposite" presStyleCnt="0"/>
+      <dgm:spPr/>
+    </dgm:pt>
+    <dgm:pt modelId="{5841BBC1-270B-384B-B9F0-C21EF8BA013E}" type="pres">
+      <dgm:prSet presAssocID="{08AD0689-6745-4D58-8DBE-C5318B852345}" presName="Child" presStyleLbl="node1" presStyleIdx="0" presStyleCnt="0">
         <dgm:presLayoutVars>
           <dgm:chMax val="0"/>
           <dgm:chPref val="0"/>
@@ -3476,40 +3619,228 @@
       </dgm:prSet>
       <dgm:spPr/>
     </dgm:pt>
-    <dgm:pt modelId="{2651699D-C635-BF43-AFCB-E82BE508AB42}" type="pres">
-      <dgm:prSet presAssocID="{08AD0689-6745-4D58-8DBE-C5318B852345}" presName="BalanceSpacing" presStyleCnt="0"/>
+    <dgm:pt modelId="{C4137255-2FBA-694D-88BB-AC5756B7D79B}" type="pres">
+      <dgm:prSet presAssocID="{08AD0689-6745-4D58-8DBE-C5318B852345}" presName="Parent" presStyleLbl="revTx" presStyleIdx="1" presStyleCnt="5">
+        <dgm:presLayoutVars>
+          <dgm:chMax val="1"/>
+          <dgm:chPref val="0"/>
+          <dgm:bulletEnabled val="1"/>
+        </dgm:presLayoutVars>
+      </dgm:prSet>
       <dgm:spPr/>
     </dgm:pt>
-    <dgm:pt modelId="{1FAB73ED-7948-9647-98CC-54E15B2532B7}" type="pres">
-      <dgm:prSet presAssocID="{08AD0689-6745-4D58-8DBE-C5318B852345}" presName="BalanceSpacing1" presStyleCnt="0"/>
+    <dgm:pt modelId="{DC40C5A0-5F3D-994D-87F6-D2258BF0A66A}" type="pres">
+      <dgm:prSet presAssocID="{2FE05B32-72A9-4901-B49E-B477239DAF5C}" presName="sibTrans" presStyleCnt="0"/>
       <dgm:spPr/>
     </dgm:pt>
-    <dgm:pt modelId="{AAAFCE80-888C-874A-B15C-E7DC955608FC}" type="pres">
-      <dgm:prSet presAssocID="{2FE05B32-72A9-4901-B49E-B477239DAF5C}" presName="Accent1Text" presStyleLbl="node1" presStyleIdx="3" presStyleCnt="4"/>
+    <dgm:pt modelId="{A6285131-D6B4-C94A-BD6D-22812C8E14CC}" type="pres">
+      <dgm:prSet presAssocID="{13134C99-34CD-234A-BBDA-27D03A5AFB46}" presName="composite" presStyleCnt="0">
+        <dgm:presLayoutVars>
+          <dgm:chMax val="1"/>
+          <dgm:chPref val="1"/>
+        </dgm:presLayoutVars>
+      </dgm:prSet>
+      <dgm:spPr/>
+    </dgm:pt>
+    <dgm:pt modelId="{F3FE4700-6A8C-D342-B49E-38000490EDB5}" type="pres">
+      <dgm:prSet presAssocID="{13134C99-34CD-234A-BBDA-27D03A5AFB46}" presName="Accent" presStyleLbl="trAlignAcc1" presStyleIdx="2" presStyleCnt="5">
+        <dgm:presLayoutVars>
+          <dgm:chMax val="0"/>
+          <dgm:chPref val="0"/>
+        </dgm:presLayoutVars>
+      </dgm:prSet>
+      <dgm:spPr/>
+    </dgm:pt>
+    <dgm:pt modelId="{FCADF763-AB2A-714B-8560-A7A5C5DF8AE2}" type="pres">
+      <dgm:prSet presAssocID="{13134C99-34CD-234A-BBDA-27D03A5AFB46}" presName="Image" presStyleLbl="alignImgPlace1" presStyleIdx="2" presStyleCnt="5">
+        <dgm:presLayoutVars>
+          <dgm:chMax val="0"/>
+          <dgm:chPref val="0"/>
+        </dgm:presLayoutVars>
+      </dgm:prSet>
+      <dgm:spPr/>
+    </dgm:pt>
+    <dgm:pt modelId="{C7EB0B36-58EB-FC4F-B2BE-4ACB03DC13F6}" type="pres">
+      <dgm:prSet presAssocID="{13134C99-34CD-234A-BBDA-27D03A5AFB46}" presName="ChildComposite" presStyleCnt="0"/>
+      <dgm:spPr/>
+    </dgm:pt>
+    <dgm:pt modelId="{032F9BCF-21B7-F44E-8737-477A6AE71D19}" type="pres">
+      <dgm:prSet presAssocID="{13134C99-34CD-234A-BBDA-27D03A5AFB46}" presName="Child" presStyleLbl="node1" presStyleIdx="0" presStyleCnt="0">
+        <dgm:presLayoutVars>
+          <dgm:chMax val="0"/>
+          <dgm:chPref val="0"/>
+          <dgm:bulletEnabled val="1"/>
+        </dgm:presLayoutVars>
+      </dgm:prSet>
+      <dgm:spPr/>
+    </dgm:pt>
+    <dgm:pt modelId="{DCD85AD6-7BE0-E04F-9459-49E4206CACC4}" type="pres">
+      <dgm:prSet presAssocID="{13134C99-34CD-234A-BBDA-27D03A5AFB46}" presName="Parent" presStyleLbl="revTx" presStyleIdx="2" presStyleCnt="5">
+        <dgm:presLayoutVars>
+          <dgm:chMax val="1"/>
+          <dgm:chPref val="0"/>
+          <dgm:bulletEnabled val="1"/>
+        </dgm:presLayoutVars>
+      </dgm:prSet>
+      <dgm:spPr/>
+    </dgm:pt>
+    <dgm:pt modelId="{80AA4190-C862-2B4C-8368-7677FB029F9E}" type="pres">
+      <dgm:prSet presAssocID="{CBA6BD30-3AA3-B741-922F-51BC0A79B6D6}" presName="sibTrans" presStyleCnt="0"/>
+      <dgm:spPr/>
+    </dgm:pt>
+    <dgm:pt modelId="{B41D759C-6DEC-7A48-9D28-C7126B00E8BC}" type="pres">
+      <dgm:prSet presAssocID="{9BA30DF9-9D28-F842-A030-03F2638ACE66}" presName="composite" presStyleCnt="0">
+        <dgm:presLayoutVars>
+          <dgm:chMax val="1"/>
+          <dgm:chPref val="1"/>
+        </dgm:presLayoutVars>
+      </dgm:prSet>
+      <dgm:spPr/>
+    </dgm:pt>
+    <dgm:pt modelId="{57CF2B79-EB1D-604A-BEB7-42A740286259}" type="pres">
+      <dgm:prSet presAssocID="{9BA30DF9-9D28-F842-A030-03F2638ACE66}" presName="Accent" presStyleLbl="trAlignAcc1" presStyleIdx="3" presStyleCnt="5">
+        <dgm:presLayoutVars>
+          <dgm:chMax val="0"/>
+          <dgm:chPref val="0"/>
+        </dgm:presLayoutVars>
+      </dgm:prSet>
+      <dgm:spPr/>
+    </dgm:pt>
+    <dgm:pt modelId="{109DE6F6-7C1C-7540-8657-B6EB9BE8B0C4}" type="pres">
+      <dgm:prSet presAssocID="{9BA30DF9-9D28-F842-A030-03F2638ACE66}" presName="Image" presStyleLbl="alignImgPlace1" presStyleIdx="3" presStyleCnt="5">
+        <dgm:presLayoutVars>
+          <dgm:chMax val="0"/>
+          <dgm:chPref val="0"/>
+        </dgm:presLayoutVars>
+      </dgm:prSet>
+      <dgm:spPr/>
+    </dgm:pt>
+    <dgm:pt modelId="{5B77E198-3955-0B46-BD3C-277EE2F193E0}" type="pres">
+      <dgm:prSet presAssocID="{9BA30DF9-9D28-F842-A030-03F2638ACE66}" presName="ChildComposite" presStyleCnt="0"/>
+      <dgm:spPr/>
+    </dgm:pt>
+    <dgm:pt modelId="{0FDEAB86-5597-2F4D-BBB5-877E0CC8EC1B}" type="pres">
+      <dgm:prSet presAssocID="{9BA30DF9-9D28-F842-A030-03F2638ACE66}" presName="Child" presStyleLbl="node1" presStyleIdx="0" presStyleCnt="0">
+        <dgm:presLayoutVars>
+          <dgm:chMax val="0"/>
+          <dgm:chPref val="0"/>
+          <dgm:bulletEnabled val="1"/>
+        </dgm:presLayoutVars>
+      </dgm:prSet>
+      <dgm:spPr/>
+    </dgm:pt>
+    <dgm:pt modelId="{9CE4DD80-0755-1542-9EE2-732B19A44741}" type="pres">
+      <dgm:prSet presAssocID="{9BA30DF9-9D28-F842-A030-03F2638ACE66}" presName="Parent" presStyleLbl="revTx" presStyleIdx="3" presStyleCnt="5">
+        <dgm:presLayoutVars>
+          <dgm:chMax val="1"/>
+          <dgm:chPref val="0"/>
+          <dgm:bulletEnabled val="1"/>
+        </dgm:presLayoutVars>
+      </dgm:prSet>
+      <dgm:spPr/>
+    </dgm:pt>
+    <dgm:pt modelId="{49AE05EF-5783-384D-8487-10636DC3203C}" type="pres">
+      <dgm:prSet presAssocID="{6365164C-9A4F-5945-B763-7D05974505A3}" presName="sibTrans" presStyleCnt="0"/>
+      <dgm:spPr/>
+    </dgm:pt>
+    <dgm:pt modelId="{FB7B0F99-8EE9-2C44-9CB3-AF9A2E9CBC1E}" type="pres">
+      <dgm:prSet presAssocID="{D23ABF72-EDF0-C64A-8CBB-6E6F6B7BEB60}" presName="composite" presStyleCnt="0">
+        <dgm:presLayoutVars>
+          <dgm:chMax val="1"/>
+          <dgm:chPref val="1"/>
+        </dgm:presLayoutVars>
+      </dgm:prSet>
+      <dgm:spPr/>
+    </dgm:pt>
+    <dgm:pt modelId="{36BC6D37-4C3C-124C-AA41-072F9D11EA07}" type="pres">
+      <dgm:prSet presAssocID="{D23ABF72-EDF0-C64A-8CBB-6E6F6B7BEB60}" presName="Accent" presStyleLbl="trAlignAcc1" presStyleIdx="4" presStyleCnt="5">
+        <dgm:presLayoutVars>
+          <dgm:chMax val="0"/>
+          <dgm:chPref val="0"/>
+        </dgm:presLayoutVars>
+      </dgm:prSet>
+      <dgm:spPr/>
+    </dgm:pt>
+    <dgm:pt modelId="{70FE2A8A-2EA9-B64E-AE77-A3118B0BD28C}" type="pres">
+      <dgm:prSet presAssocID="{D23ABF72-EDF0-C64A-8CBB-6E6F6B7BEB60}" presName="Image" presStyleLbl="alignImgPlace1" presStyleIdx="4" presStyleCnt="5">
+        <dgm:presLayoutVars>
+          <dgm:chMax val="0"/>
+          <dgm:chPref val="0"/>
+        </dgm:presLayoutVars>
+      </dgm:prSet>
+      <dgm:spPr/>
+    </dgm:pt>
+    <dgm:pt modelId="{8F699D03-1274-124E-B058-C31F8B300B91}" type="pres">
+      <dgm:prSet presAssocID="{D23ABF72-EDF0-C64A-8CBB-6E6F6B7BEB60}" presName="ChildComposite" presStyleCnt="0"/>
+      <dgm:spPr/>
+    </dgm:pt>
+    <dgm:pt modelId="{6954AC25-AF92-684F-8C00-63E163771D4E}" type="pres">
+      <dgm:prSet presAssocID="{D23ABF72-EDF0-C64A-8CBB-6E6F6B7BEB60}" presName="Child" presStyleLbl="node1" presStyleIdx="0" presStyleCnt="0">
+        <dgm:presLayoutVars>
+          <dgm:chMax val="0"/>
+          <dgm:chPref val="0"/>
+          <dgm:bulletEnabled val="1"/>
+        </dgm:presLayoutVars>
+      </dgm:prSet>
+      <dgm:spPr/>
+    </dgm:pt>
+    <dgm:pt modelId="{0D75C802-F65F-F44B-A676-00B28A1D9E26}" type="pres">
+      <dgm:prSet presAssocID="{D23ABF72-EDF0-C64A-8CBB-6E6F6B7BEB60}" presName="Parent" presStyleLbl="revTx" presStyleIdx="4" presStyleCnt="5">
+        <dgm:presLayoutVars>
+          <dgm:chMax val="1"/>
+          <dgm:chPref val="0"/>
+          <dgm:bulletEnabled val="1"/>
+        </dgm:presLayoutVars>
+      </dgm:prSet>
       <dgm:spPr/>
     </dgm:pt>
   </dgm:ptLst>
   <dgm:cxnLst>
-    <dgm:cxn modelId="{F251C93C-9284-A447-8909-8ECFF4EBCB0C}" type="presOf" srcId="{EBE1269D-F419-4871-A35B-8D86298D50EA}" destId="{DC7BE218-E49C-D14A-A4DF-840BA1F0DB6F}" srcOrd="0" destOrd="0" presId="urn:microsoft.com/office/officeart/2008/layout/AlternatingHexagons"/>
+    <dgm:cxn modelId="{FD3C4100-CD4B-BF41-8719-FA173A5D3FF9}" srcId="{EBE1269D-F419-4871-A35B-8D86298D50EA}" destId="{13134C99-34CD-234A-BBDA-27D03A5AFB46}" srcOrd="2" destOrd="0" parTransId="{D2D1E4D5-F8B9-4443-98AC-876D28ECAB09}" sibTransId="{CBA6BD30-3AA3-B741-922F-51BC0A79B6D6}"/>
+    <dgm:cxn modelId="{FF1C442D-DE1B-294C-AD1E-1BCD9101E3AD}" type="presOf" srcId="{D23ABF72-EDF0-C64A-8CBB-6E6F6B7BEB60}" destId="{0D75C802-F65F-F44B-A676-00B28A1D9E26}" srcOrd="0" destOrd="0" presId="urn:microsoft.com/office/officeart/2008/layout/CaptionedPictures"/>
+    <dgm:cxn modelId="{2FF95D2E-0FCB-8D42-83A1-A21FAF2F2866}" type="presOf" srcId="{08AD0689-6745-4D58-8DBE-C5318B852345}" destId="{C4137255-2FBA-694D-88BB-AC5756B7D79B}" srcOrd="0" destOrd="0" presId="urn:microsoft.com/office/officeart/2008/layout/CaptionedPictures"/>
+    <dgm:cxn modelId="{AF5CE93A-8D4B-B249-8C11-64A68A67A08A}" type="presOf" srcId="{C36D9BB9-E319-4DD9-BAC6-5C7D85C634F2}" destId="{17C006A3-EEFA-3A45-88DD-F8407CDFB953}" srcOrd="0" destOrd="0" presId="urn:microsoft.com/office/officeart/2008/layout/CaptionedPictures"/>
+    <dgm:cxn modelId="{3DF42049-4742-9B4D-A7B2-0976B4307076}" type="presOf" srcId="{EBE1269D-F419-4871-A35B-8D86298D50EA}" destId="{9F4F91C9-55A6-5C43-B339-D0611FAF0684}" srcOrd="0" destOrd="0" presId="urn:microsoft.com/office/officeart/2008/layout/CaptionedPictures"/>
+    <dgm:cxn modelId="{22DB7E54-61D6-B940-93E1-9027BE57E740}" type="presOf" srcId="{9BA30DF9-9D28-F842-A030-03F2638ACE66}" destId="{9CE4DD80-0755-1542-9EE2-732B19A44741}" srcOrd="0" destOrd="0" presId="urn:microsoft.com/office/officeart/2008/layout/CaptionedPictures"/>
+    <dgm:cxn modelId="{ECBB3182-1DEF-EE46-86E3-4059222F1DA9}" srcId="{EBE1269D-F419-4871-A35B-8D86298D50EA}" destId="{9BA30DF9-9D28-F842-A030-03F2638ACE66}" srcOrd="3" destOrd="0" parTransId="{D3F94F8D-4342-6544-96E6-12E296F42E31}" sibTransId="{6365164C-9A4F-5945-B763-7D05974505A3}"/>
+    <dgm:cxn modelId="{24F30187-89D4-8D41-8F5E-8C8F64BCF6FA}" srcId="{EBE1269D-F419-4871-A35B-8D86298D50EA}" destId="{D23ABF72-EDF0-C64A-8CBB-6E6F6B7BEB60}" srcOrd="4" destOrd="0" parTransId="{D435D034-900D-E248-AF44-7719C0D45FEE}" sibTransId="{6BE09F03-F813-BB45-9152-3E338B101B57}"/>
     <dgm:cxn modelId="{00553892-9D44-43B4-8FBB-6562BB6ED3E7}" srcId="{EBE1269D-F419-4871-A35B-8D86298D50EA}" destId="{C36D9BB9-E319-4DD9-BAC6-5C7D85C634F2}" srcOrd="0" destOrd="0" parTransId="{CA12E022-AD5D-4999-85CB-E0FFC6495263}" sibTransId="{3DFBAF57-61C6-42EB-A960-BB17BC161795}"/>
     <dgm:cxn modelId="{F8C56FA1-4BFE-4301-B356-13D6431CB4E4}" srcId="{EBE1269D-F419-4871-A35B-8D86298D50EA}" destId="{08AD0689-6745-4D58-8DBE-C5318B852345}" srcOrd="1" destOrd="0" parTransId="{D386EF7F-A405-40A4-AD28-801CA03C1A26}" sibTransId="{2FE05B32-72A9-4901-B49E-B477239DAF5C}"/>
-    <dgm:cxn modelId="{197DC7A4-E892-7449-B803-3F865CCAB254}" type="presOf" srcId="{3DFBAF57-61C6-42EB-A960-BB17BC161795}" destId="{BF6F1B37-B6EF-644C-8563-53D339B324CF}" srcOrd="0" destOrd="0" presId="urn:microsoft.com/office/officeart/2008/layout/AlternatingHexagons"/>
-    <dgm:cxn modelId="{40D25EB5-74FF-294F-A366-A25585A7A7FA}" type="presOf" srcId="{2FE05B32-72A9-4901-B49E-B477239DAF5C}" destId="{AAAFCE80-888C-874A-B15C-E7DC955608FC}" srcOrd="0" destOrd="0" presId="urn:microsoft.com/office/officeart/2008/layout/AlternatingHexagons"/>
-    <dgm:cxn modelId="{663B6AE1-3DB6-1D4D-90AB-902A681D3E74}" type="presOf" srcId="{08AD0689-6745-4D58-8DBE-C5318B852345}" destId="{7ADC6D60-6984-934A-82F3-03B7C6EAE1F7}" srcOrd="0" destOrd="0" presId="urn:microsoft.com/office/officeart/2008/layout/AlternatingHexagons"/>
-    <dgm:cxn modelId="{F07CB7F2-ECFC-9B4E-B4A5-D41E9CA354E3}" type="presOf" srcId="{C36D9BB9-E319-4DD9-BAC6-5C7D85C634F2}" destId="{CFC2DF33-135D-614F-B500-1A19C5983E0A}" srcOrd="0" destOrd="0" presId="urn:microsoft.com/office/officeart/2008/layout/AlternatingHexagons"/>
-    <dgm:cxn modelId="{0C7BFB98-1AC4-9547-A047-D0FEBF2E1C97}" type="presParOf" srcId="{DC7BE218-E49C-D14A-A4DF-840BA1F0DB6F}" destId="{B6D990A2-0C86-3D4E-9706-99CDB829A164}" srcOrd="0" destOrd="0" presId="urn:microsoft.com/office/officeart/2008/layout/AlternatingHexagons"/>
-    <dgm:cxn modelId="{44BCF2CD-353E-1F4E-BAC7-04180BE1C4FE}" type="presParOf" srcId="{B6D990A2-0C86-3D4E-9706-99CDB829A164}" destId="{CFC2DF33-135D-614F-B500-1A19C5983E0A}" srcOrd="0" destOrd="0" presId="urn:microsoft.com/office/officeart/2008/layout/AlternatingHexagons"/>
-    <dgm:cxn modelId="{D3385629-BEAD-ED4E-B53F-B4F70C833DE8}" type="presParOf" srcId="{B6D990A2-0C86-3D4E-9706-99CDB829A164}" destId="{D574E64A-9673-B94B-BC12-701C142F9A2B}" srcOrd="1" destOrd="0" presId="urn:microsoft.com/office/officeart/2008/layout/AlternatingHexagons"/>
-    <dgm:cxn modelId="{0A4955C4-9B2C-5847-9B26-6A5C1B9791FE}" type="presParOf" srcId="{B6D990A2-0C86-3D4E-9706-99CDB829A164}" destId="{C57BBD7F-6BE1-4845-B03E-0E9FC5A5727A}" srcOrd="2" destOrd="0" presId="urn:microsoft.com/office/officeart/2008/layout/AlternatingHexagons"/>
-    <dgm:cxn modelId="{E77934A8-96BC-1943-BC23-8C285FAB62B5}" type="presParOf" srcId="{B6D990A2-0C86-3D4E-9706-99CDB829A164}" destId="{48FF5544-2D10-7C43-9E68-7E8216C15CA3}" srcOrd="3" destOrd="0" presId="urn:microsoft.com/office/officeart/2008/layout/AlternatingHexagons"/>
-    <dgm:cxn modelId="{60BB8643-269B-FC4D-A521-0B5A93035B6E}" type="presParOf" srcId="{B6D990A2-0C86-3D4E-9706-99CDB829A164}" destId="{BF6F1B37-B6EF-644C-8563-53D339B324CF}" srcOrd="4" destOrd="0" presId="urn:microsoft.com/office/officeart/2008/layout/AlternatingHexagons"/>
-    <dgm:cxn modelId="{B5A73996-1D70-264D-B6A1-CD7FEED22582}" type="presParOf" srcId="{DC7BE218-E49C-D14A-A4DF-840BA1F0DB6F}" destId="{2EB3C97D-80C4-C942-B23A-724FFA293CCB}" srcOrd="1" destOrd="0" presId="urn:microsoft.com/office/officeart/2008/layout/AlternatingHexagons"/>
-    <dgm:cxn modelId="{9823DAF1-74D2-4A4B-90F7-C9B97DDB5D8E}" type="presParOf" srcId="{DC7BE218-E49C-D14A-A4DF-840BA1F0DB6F}" destId="{51669CFE-A069-7A4B-8101-388C2EC1B929}" srcOrd="2" destOrd="0" presId="urn:microsoft.com/office/officeart/2008/layout/AlternatingHexagons"/>
-    <dgm:cxn modelId="{85EC9C83-E775-FC42-8388-4EB319A6CB67}" type="presParOf" srcId="{51669CFE-A069-7A4B-8101-388C2EC1B929}" destId="{7ADC6D60-6984-934A-82F3-03B7C6EAE1F7}" srcOrd="0" destOrd="0" presId="urn:microsoft.com/office/officeart/2008/layout/AlternatingHexagons"/>
-    <dgm:cxn modelId="{02711F38-44E8-2F4C-AA33-CA2076FA7ED3}" type="presParOf" srcId="{51669CFE-A069-7A4B-8101-388C2EC1B929}" destId="{19A1316C-D877-D947-BABA-AA210C2D981A}" srcOrd="1" destOrd="0" presId="urn:microsoft.com/office/officeart/2008/layout/AlternatingHexagons"/>
-    <dgm:cxn modelId="{A6590FE1-3A1E-6F48-AEEF-D753E9D0794D}" type="presParOf" srcId="{51669CFE-A069-7A4B-8101-388C2EC1B929}" destId="{2651699D-C635-BF43-AFCB-E82BE508AB42}" srcOrd="2" destOrd="0" presId="urn:microsoft.com/office/officeart/2008/layout/AlternatingHexagons"/>
-    <dgm:cxn modelId="{4DB6740C-54A5-A140-B3BA-F6E2D44F14E5}" type="presParOf" srcId="{51669CFE-A069-7A4B-8101-388C2EC1B929}" destId="{1FAB73ED-7948-9647-98CC-54E15B2532B7}" srcOrd="3" destOrd="0" presId="urn:microsoft.com/office/officeart/2008/layout/AlternatingHexagons"/>
-    <dgm:cxn modelId="{7BE2754B-9DDA-9F4D-8A6C-108A34AEA42B}" type="presParOf" srcId="{51669CFE-A069-7A4B-8101-388C2EC1B929}" destId="{AAAFCE80-888C-874A-B15C-E7DC955608FC}" srcOrd="4" destOrd="0" presId="urn:microsoft.com/office/officeart/2008/layout/AlternatingHexagons"/>
+    <dgm:cxn modelId="{00E759D1-22F5-7A40-ADED-1701C4DF1656}" type="presOf" srcId="{13134C99-34CD-234A-BBDA-27D03A5AFB46}" destId="{DCD85AD6-7BE0-E04F-9459-49E4206CACC4}" srcOrd="0" destOrd="0" presId="urn:microsoft.com/office/officeart/2008/layout/CaptionedPictures"/>
+    <dgm:cxn modelId="{2E3B504E-C169-184A-A554-80D1775D961E}" type="presParOf" srcId="{9F4F91C9-55A6-5C43-B339-D0611FAF0684}" destId="{C72462CB-815B-154E-98BC-2838743C0C03}" srcOrd="0" destOrd="0" presId="urn:microsoft.com/office/officeart/2008/layout/CaptionedPictures"/>
+    <dgm:cxn modelId="{E2D9105A-295B-B644-A99F-403D7E5224E4}" type="presParOf" srcId="{C72462CB-815B-154E-98BC-2838743C0C03}" destId="{3B2739A1-F650-2548-BC29-B71106EC9DF3}" srcOrd="0" destOrd="0" presId="urn:microsoft.com/office/officeart/2008/layout/CaptionedPictures"/>
+    <dgm:cxn modelId="{14B37F81-642F-D34D-B89F-12778F62602E}" type="presParOf" srcId="{C72462CB-815B-154E-98BC-2838743C0C03}" destId="{BA928CF2-BF28-984C-96A1-B6B5C179FD0C}" srcOrd="1" destOrd="0" presId="urn:microsoft.com/office/officeart/2008/layout/CaptionedPictures"/>
+    <dgm:cxn modelId="{28D16083-264A-F945-B931-19C9606523B2}" type="presParOf" srcId="{C72462CB-815B-154E-98BC-2838743C0C03}" destId="{20185D9C-4BC3-5142-834F-2D258B69322F}" srcOrd="2" destOrd="0" presId="urn:microsoft.com/office/officeart/2008/layout/CaptionedPictures"/>
+    <dgm:cxn modelId="{A59C3D8F-7DF6-3740-9E91-F32EC5AEB1E4}" type="presParOf" srcId="{20185D9C-4BC3-5142-834F-2D258B69322F}" destId="{45E4CC70-86EF-6248-B3E7-943C7F6B09A8}" srcOrd="0" destOrd="0" presId="urn:microsoft.com/office/officeart/2008/layout/CaptionedPictures"/>
+    <dgm:cxn modelId="{C9E5FE4B-5E61-D741-AF6E-CCF371624F88}" type="presParOf" srcId="{20185D9C-4BC3-5142-834F-2D258B69322F}" destId="{17C006A3-EEFA-3A45-88DD-F8407CDFB953}" srcOrd="1" destOrd="0" presId="urn:microsoft.com/office/officeart/2008/layout/CaptionedPictures"/>
+    <dgm:cxn modelId="{5CFE08F5-0FE2-E945-B4B1-B610E7EBA1B6}" type="presParOf" srcId="{9F4F91C9-55A6-5C43-B339-D0611FAF0684}" destId="{B97739F4-2F27-8F43-82F1-96DF796B0F48}" srcOrd="1" destOrd="0" presId="urn:microsoft.com/office/officeart/2008/layout/CaptionedPictures"/>
+    <dgm:cxn modelId="{C174438D-97CB-A343-ABD6-79C644507E4F}" type="presParOf" srcId="{9F4F91C9-55A6-5C43-B339-D0611FAF0684}" destId="{1E337137-E615-5142-8F76-0C74FB75FCB6}" srcOrd="2" destOrd="0" presId="urn:microsoft.com/office/officeart/2008/layout/CaptionedPictures"/>
+    <dgm:cxn modelId="{20A312FE-BD4C-6140-A5EB-5B297A0D7C30}" type="presParOf" srcId="{1E337137-E615-5142-8F76-0C74FB75FCB6}" destId="{06F479F1-3DCA-2B4E-A342-7677D3805194}" srcOrd="0" destOrd="0" presId="urn:microsoft.com/office/officeart/2008/layout/CaptionedPictures"/>
+    <dgm:cxn modelId="{4EE8D8D3-5616-914E-8A74-513EFD310DD4}" type="presParOf" srcId="{1E337137-E615-5142-8F76-0C74FB75FCB6}" destId="{3AC27D81-1F71-484D-9F02-355518FDF89C}" srcOrd="1" destOrd="0" presId="urn:microsoft.com/office/officeart/2008/layout/CaptionedPictures"/>
+    <dgm:cxn modelId="{66FA847B-5751-B145-8A2D-E1A78EBAC151}" type="presParOf" srcId="{1E337137-E615-5142-8F76-0C74FB75FCB6}" destId="{1B92D5F7-D1DB-C24F-84F3-4D948A6A7190}" srcOrd="2" destOrd="0" presId="urn:microsoft.com/office/officeart/2008/layout/CaptionedPictures"/>
+    <dgm:cxn modelId="{CDE2080D-A99C-A14C-8317-661B3A9C1674}" type="presParOf" srcId="{1B92D5F7-D1DB-C24F-84F3-4D948A6A7190}" destId="{5841BBC1-270B-384B-B9F0-C21EF8BA013E}" srcOrd="0" destOrd="0" presId="urn:microsoft.com/office/officeart/2008/layout/CaptionedPictures"/>
+    <dgm:cxn modelId="{0DADE18D-F0A9-BA41-92AD-D977CED45ADA}" type="presParOf" srcId="{1B92D5F7-D1DB-C24F-84F3-4D948A6A7190}" destId="{C4137255-2FBA-694D-88BB-AC5756B7D79B}" srcOrd="1" destOrd="0" presId="urn:microsoft.com/office/officeart/2008/layout/CaptionedPictures"/>
+    <dgm:cxn modelId="{BE130283-0703-2D4F-ADFE-CBE454AB64F3}" type="presParOf" srcId="{9F4F91C9-55A6-5C43-B339-D0611FAF0684}" destId="{DC40C5A0-5F3D-994D-87F6-D2258BF0A66A}" srcOrd="3" destOrd="0" presId="urn:microsoft.com/office/officeart/2008/layout/CaptionedPictures"/>
+    <dgm:cxn modelId="{7C5946C6-A8FD-8D4E-B25D-886FA4BE8E69}" type="presParOf" srcId="{9F4F91C9-55A6-5C43-B339-D0611FAF0684}" destId="{A6285131-D6B4-C94A-BD6D-22812C8E14CC}" srcOrd="4" destOrd="0" presId="urn:microsoft.com/office/officeart/2008/layout/CaptionedPictures"/>
+    <dgm:cxn modelId="{B2DB4445-EABD-8946-9D00-A6F20165EFD4}" type="presParOf" srcId="{A6285131-D6B4-C94A-BD6D-22812C8E14CC}" destId="{F3FE4700-6A8C-D342-B49E-38000490EDB5}" srcOrd="0" destOrd="0" presId="urn:microsoft.com/office/officeart/2008/layout/CaptionedPictures"/>
+    <dgm:cxn modelId="{151FE362-89A2-F643-AA59-49D17F91E317}" type="presParOf" srcId="{A6285131-D6B4-C94A-BD6D-22812C8E14CC}" destId="{FCADF763-AB2A-714B-8560-A7A5C5DF8AE2}" srcOrd="1" destOrd="0" presId="urn:microsoft.com/office/officeart/2008/layout/CaptionedPictures"/>
+    <dgm:cxn modelId="{D9B01CEA-5710-1042-BC4D-10B055838DB5}" type="presParOf" srcId="{A6285131-D6B4-C94A-BD6D-22812C8E14CC}" destId="{C7EB0B36-58EB-FC4F-B2BE-4ACB03DC13F6}" srcOrd="2" destOrd="0" presId="urn:microsoft.com/office/officeart/2008/layout/CaptionedPictures"/>
+    <dgm:cxn modelId="{AF828261-3DA2-B844-A408-9058C5E748F6}" type="presParOf" srcId="{C7EB0B36-58EB-FC4F-B2BE-4ACB03DC13F6}" destId="{032F9BCF-21B7-F44E-8737-477A6AE71D19}" srcOrd="0" destOrd="0" presId="urn:microsoft.com/office/officeart/2008/layout/CaptionedPictures"/>
+    <dgm:cxn modelId="{D957ECB6-AD23-764F-AB58-02E175B4EF7F}" type="presParOf" srcId="{C7EB0B36-58EB-FC4F-B2BE-4ACB03DC13F6}" destId="{DCD85AD6-7BE0-E04F-9459-49E4206CACC4}" srcOrd="1" destOrd="0" presId="urn:microsoft.com/office/officeart/2008/layout/CaptionedPictures"/>
+    <dgm:cxn modelId="{56C393C2-5AF0-6E40-AC3F-7C9CC5725043}" type="presParOf" srcId="{9F4F91C9-55A6-5C43-B339-D0611FAF0684}" destId="{80AA4190-C862-2B4C-8368-7677FB029F9E}" srcOrd="5" destOrd="0" presId="urn:microsoft.com/office/officeart/2008/layout/CaptionedPictures"/>
+    <dgm:cxn modelId="{2D63846F-8218-1E48-A724-9CCEDC0AD976}" type="presParOf" srcId="{9F4F91C9-55A6-5C43-B339-D0611FAF0684}" destId="{B41D759C-6DEC-7A48-9D28-C7126B00E8BC}" srcOrd="6" destOrd="0" presId="urn:microsoft.com/office/officeart/2008/layout/CaptionedPictures"/>
+    <dgm:cxn modelId="{0EBB1AF8-0BCE-6D49-A29A-B3AF49C3B124}" type="presParOf" srcId="{B41D759C-6DEC-7A48-9D28-C7126B00E8BC}" destId="{57CF2B79-EB1D-604A-BEB7-42A740286259}" srcOrd="0" destOrd="0" presId="urn:microsoft.com/office/officeart/2008/layout/CaptionedPictures"/>
+    <dgm:cxn modelId="{B23560F3-7706-9F41-B581-78B9105CF7CC}" type="presParOf" srcId="{B41D759C-6DEC-7A48-9D28-C7126B00E8BC}" destId="{109DE6F6-7C1C-7540-8657-B6EB9BE8B0C4}" srcOrd="1" destOrd="0" presId="urn:microsoft.com/office/officeart/2008/layout/CaptionedPictures"/>
+    <dgm:cxn modelId="{C85C0AB7-4C49-4441-BAB7-B3001AD87DEF}" type="presParOf" srcId="{B41D759C-6DEC-7A48-9D28-C7126B00E8BC}" destId="{5B77E198-3955-0B46-BD3C-277EE2F193E0}" srcOrd="2" destOrd="0" presId="urn:microsoft.com/office/officeart/2008/layout/CaptionedPictures"/>
+    <dgm:cxn modelId="{B841F925-5939-6E40-88D4-B1B3A88C67AD}" type="presParOf" srcId="{5B77E198-3955-0B46-BD3C-277EE2F193E0}" destId="{0FDEAB86-5597-2F4D-BBB5-877E0CC8EC1B}" srcOrd="0" destOrd="0" presId="urn:microsoft.com/office/officeart/2008/layout/CaptionedPictures"/>
+    <dgm:cxn modelId="{DD031846-6DCF-5C4D-9436-00693C4475F0}" type="presParOf" srcId="{5B77E198-3955-0B46-BD3C-277EE2F193E0}" destId="{9CE4DD80-0755-1542-9EE2-732B19A44741}" srcOrd="1" destOrd="0" presId="urn:microsoft.com/office/officeart/2008/layout/CaptionedPictures"/>
+    <dgm:cxn modelId="{DBD6E1FC-EDAC-CE4F-A96A-138F2F423B86}" type="presParOf" srcId="{9F4F91C9-55A6-5C43-B339-D0611FAF0684}" destId="{49AE05EF-5783-384D-8487-10636DC3203C}" srcOrd="7" destOrd="0" presId="urn:microsoft.com/office/officeart/2008/layout/CaptionedPictures"/>
+    <dgm:cxn modelId="{E7D2FBCE-1DCB-3E43-A87F-E9CBB03C64C1}" type="presParOf" srcId="{9F4F91C9-55A6-5C43-B339-D0611FAF0684}" destId="{FB7B0F99-8EE9-2C44-9CB3-AF9A2E9CBC1E}" srcOrd="8" destOrd="0" presId="urn:microsoft.com/office/officeart/2008/layout/CaptionedPictures"/>
+    <dgm:cxn modelId="{DFDA4B5A-0656-354C-84CB-0FEBD12E4FF4}" type="presParOf" srcId="{FB7B0F99-8EE9-2C44-9CB3-AF9A2E9CBC1E}" destId="{36BC6D37-4C3C-124C-AA41-072F9D11EA07}" srcOrd="0" destOrd="0" presId="urn:microsoft.com/office/officeart/2008/layout/CaptionedPictures"/>
+    <dgm:cxn modelId="{766E519A-BD2B-AB42-A07D-09446C23E870}" type="presParOf" srcId="{FB7B0F99-8EE9-2C44-9CB3-AF9A2E9CBC1E}" destId="{70FE2A8A-2EA9-B64E-AE77-A3118B0BD28C}" srcOrd="1" destOrd="0" presId="urn:microsoft.com/office/officeart/2008/layout/CaptionedPictures"/>
+    <dgm:cxn modelId="{6F6ECF30-1F32-B245-B387-DE7B2E2160F3}" type="presParOf" srcId="{FB7B0F99-8EE9-2C44-9CB3-AF9A2E9CBC1E}" destId="{8F699D03-1274-124E-B058-C31F8B300B91}" srcOrd="2" destOrd="0" presId="urn:microsoft.com/office/officeart/2008/layout/CaptionedPictures"/>
+    <dgm:cxn modelId="{FBA8EB47-AEA7-664D-992E-896DBCF2DBDA}" type="presParOf" srcId="{8F699D03-1274-124E-B058-C31F8B300B91}" destId="{6954AC25-AF92-684F-8C00-63E163771D4E}" srcOrd="0" destOrd="0" presId="urn:microsoft.com/office/officeart/2008/layout/CaptionedPictures"/>
+    <dgm:cxn modelId="{7829CE14-5D55-5544-8931-F31EF8E326B5}" type="presParOf" srcId="{8F699D03-1274-124E-B058-C31F8B300B91}" destId="{0D75C802-F65F-F44B-A676-00B28A1D9E26}" srcOrd="1" destOrd="0" presId="urn:microsoft.com/office/officeart/2008/layout/CaptionedPictures"/>
   </dgm:cxnLst>
   <dgm:bg/>
   <dgm:whole/>
@@ -4567,24 +4898,71 @@
       <dsp:cNvGrpSpPr/>
     </dsp:nvGrpSpPr>
     <dsp:grpSpPr/>
-    <dsp:sp modelId="{CFC2DF33-135D-614F-B500-1A19C5983E0A}">
+    <dsp:sp modelId="{3B2739A1-F650-2548-BC29-B71106EC9DF3}">
       <dsp:nvSpPr>
         <dsp:cNvPr id="0" name=""/>
         <dsp:cNvSpPr/>
       </dsp:nvSpPr>
       <dsp:spPr>
-        <a:xfrm rot="5400000">
-          <a:off x="4884900" y="132777"/>
-          <a:ext cx="2020777" cy="1758076"/>
+        <a:xfrm>
+          <a:off x="8155" y="865343"/>
+          <a:ext cx="1706953" cy="2008181"/>
         </a:xfrm>
-        <a:prstGeom prst="hexagon">
-          <a:avLst>
-            <a:gd name="adj" fmla="val 25000"/>
-            <a:gd name="vf" fmla="val 115470"/>
-          </a:avLst>
+        <a:prstGeom prst="rect">
+          <a:avLst/>
+        </a:prstGeom>
+        <a:solidFill>
+          <a:schemeClr val="lt2">
+            <a:alpha val="40000"/>
+            <a:hueOff val="0"/>
+            <a:satOff val="0"/>
+            <a:lumOff val="0"/>
+            <a:alphaOff val="0"/>
+          </a:schemeClr>
+        </a:solidFill>
+        <a:ln w="6350" cap="flat" cmpd="sng" algn="ctr">
+          <a:solidFill>
+            <a:schemeClr val="dk2">
+              <a:hueOff val="0"/>
+              <a:satOff val="0"/>
+              <a:lumOff val="0"/>
+              <a:alphaOff val="0"/>
+            </a:schemeClr>
+          </a:solidFill>
+          <a:prstDash val="solid"/>
+          <a:miter lim="800000"/>
+        </a:ln>
+        <a:effectLst/>
+      </dsp:spPr>
+      <dsp:style>
+        <a:lnRef idx="1">
+          <a:scrgbClr r="0" g="0" b="0"/>
+        </a:lnRef>
+        <a:fillRef idx="1">
+          <a:scrgbClr r="0" g="0" b="0"/>
+        </a:fillRef>
+        <a:effectRef idx="0">
+          <a:scrgbClr r="0" g="0" b="0"/>
+        </a:effectRef>
+        <a:fontRef idx="minor"/>
+      </dsp:style>
+    </dsp:sp>
+    <dsp:sp modelId="{BA928CF2-BF28-984C-96A1-B6B5C179FD0C}">
+      <dsp:nvSpPr>
+        <dsp:cNvPr id="0" name=""/>
+        <dsp:cNvSpPr/>
+      </dsp:nvSpPr>
+      <dsp:spPr>
+        <a:xfrm>
+          <a:off x="93503" y="945670"/>
+          <a:ext cx="1536258" cy="1305317"/>
+        </a:xfrm>
+        <a:prstGeom prst="rect">
+          <a:avLst/>
         </a:prstGeom>
         <a:solidFill>
           <a:schemeClr val="dk2">
+            <a:tint val="50000"/>
             <a:hueOff val="0"/>
             <a:satOff val="0"/>
             <a:lumOff val="0"/>
@@ -4593,7 +4971,8 @@
         </a:solidFill>
         <a:ln w="12700" cap="flat" cmpd="sng" algn="ctr">
           <a:solidFill>
-            <a:schemeClr val="lt2">
+            <a:schemeClr val="dk2">
+              <a:shade val="80000"/>
               <a:hueOff val="0"/>
               <a:satOff val="0"/>
               <a:lumOff val="0"/>
@@ -4615,48 +4994,18 @@
         <a:effectRef idx="0">
           <a:scrgbClr r="0" g="0" b="0"/>
         </a:effectRef>
-        <a:fontRef idx="minor">
-          <a:schemeClr val="lt1"/>
-        </a:fontRef>
+        <a:fontRef idx="minor"/>
       </dsp:style>
-      <dsp:txBody>
-        <a:bodyPr spcFirstLastPara="0" vert="horz" wrap="square" lIns="60960" tIns="60960" rIns="60960" bIns="60960" numCol="1" spcCol="1270" anchor="ctr" anchorCtr="0">
-          <a:noAutofit/>
-        </a:bodyPr>
-        <a:lstStyle/>
-        <a:p>
-          <a:pPr marL="0" lvl="0" indent="0" algn="ctr" defTabSz="711200">
-            <a:lnSpc>
-              <a:spcPct val="90000"/>
-            </a:lnSpc>
-            <a:spcBef>
-              <a:spcPct val="0"/>
-            </a:spcBef>
-            <a:spcAft>
-              <a:spcPct val="35000"/>
-            </a:spcAft>
-            <a:buNone/>
-          </a:pPr>
-          <a:r>
-            <a:rPr lang="en-US" sz="1600" kern="1200"/>
-            <a:t>Introduction</a:t>
-          </a:r>
-        </a:p>
-      </dsp:txBody>
-      <dsp:txXfrm rot="-5400000">
-        <a:off x="5290217" y="316331"/>
-        <a:ext cx="1210142" cy="1390969"/>
-      </dsp:txXfrm>
     </dsp:sp>
-    <dsp:sp modelId="{D574E64A-9673-B94B-BC12-701C142F9A2B}">
+    <dsp:sp modelId="{17C006A3-EEFA-3A45-88DD-F8407CDFB953}">
       <dsp:nvSpPr>
         <dsp:cNvPr id="0" name=""/>
         <dsp:cNvSpPr/>
       </dsp:nvSpPr>
       <dsp:spPr>
         <a:xfrm>
-          <a:off x="6827676" y="405582"/>
-          <a:ext cx="2255188" cy="1212466"/>
+          <a:off x="93503" y="2250988"/>
+          <a:ext cx="1536258" cy="542208"/>
         </a:xfrm>
         <a:prstGeom prst="rect">
           <a:avLst/>
@@ -4679,25 +5028,100 @@
         </a:effectRef>
         <a:fontRef idx="minor"/>
       </dsp:style>
+      <dsp:txBody>
+        <a:bodyPr spcFirstLastPara="0" vert="horz" wrap="square" lIns="57150" tIns="57150" rIns="57150" bIns="57150" numCol="1" spcCol="1270" anchor="ctr" anchorCtr="0">
+          <a:noAutofit/>
+        </a:bodyPr>
+        <a:lstStyle/>
+        <a:p>
+          <a:pPr marL="0" lvl="0" indent="0" algn="ctr" defTabSz="666750">
+            <a:lnSpc>
+              <a:spcPct val="90000"/>
+            </a:lnSpc>
+            <a:spcBef>
+              <a:spcPct val="0"/>
+            </a:spcBef>
+            <a:spcAft>
+              <a:spcPct val="35000"/>
+            </a:spcAft>
+            <a:buNone/>
+          </a:pPr>
+          <a:r>
+            <a:rPr lang="en-US" sz="1500" kern="1200"/>
+            <a:t>Introduction</a:t>
+          </a:r>
+        </a:p>
+      </dsp:txBody>
+      <dsp:txXfrm>
+        <a:off x="93503" y="2250988"/>
+        <a:ext cx="1536258" cy="542208"/>
+      </dsp:txXfrm>
     </dsp:sp>
-    <dsp:sp modelId="{BF6F1B37-B6EF-644C-8563-53D339B324CF}">
+    <dsp:sp modelId="{06F479F1-3DCA-2B4E-A342-7677D3805194}">
       <dsp:nvSpPr>
         <dsp:cNvPr id="0" name=""/>
         <dsp:cNvSpPr/>
       </dsp:nvSpPr>
       <dsp:spPr>
-        <a:xfrm rot="5400000">
-          <a:off x="2986177" y="132777"/>
-          <a:ext cx="2020777" cy="1758076"/>
+        <a:xfrm>
+          <a:off x="2300071" y="865343"/>
+          <a:ext cx="1706953" cy="2008181"/>
         </a:xfrm>
-        <a:prstGeom prst="hexagon">
-          <a:avLst>
-            <a:gd name="adj" fmla="val 25000"/>
-            <a:gd name="vf" fmla="val 115470"/>
-          </a:avLst>
+        <a:prstGeom prst="rect">
+          <a:avLst/>
+        </a:prstGeom>
+        <a:solidFill>
+          <a:schemeClr val="lt2">
+            <a:alpha val="40000"/>
+            <a:hueOff val="0"/>
+            <a:satOff val="0"/>
+            <a:lumOff val="0"/>
+            <a:alphaOff val="0"/>
+          </a:schemeClr>
+        </a:solidFill>
+        <a:ln w="6350" cap="flat" cmpd="sng" algn="ctr">
+          <a:solidFill>
+            <a:schemeClr val="dk2">
+              <a:hueOff val="0"/>
+              <a:satOff val="0"/>
+              <a:lumOff val="0"/>
+              <a:alphaOff val="0"/>
+            </a:schemeClr>
+          </a:solidFill>
+          <a:prstDash val="solid"/>
+          <a:miter lim="800000"/>
+        </a:ln>
+        <a:effectLst/>
+      </dsp:spPr>
+      <dsp:style>
+        <a:lnRef idx="1">
+          <a:scrgbClr r="0" g="0" b="0"/>
+        </a:lnRef>
+        <a:fillRef idx="1">
+          <a:scrgbClr r="0" g="0" b="0"/>
+        </a:fillRef>
+        <a:effectRef idx="0">
+          <a:scrgbClr r="0" g="0" b="0"/>
+        </a:effectRef>
+        <a:fontRef idx="minor"/>
+      </dsp:style>
+    </dsp:sp>
+    <dsp:sp modelId="{3AC27D81-1F71-484D-9F02-355518FDF89C}">
+      <dsp:nvSpPr>
+        <dsp:cNvPr id="0" name=""/>
+        <dsp:cNvSpPr/>
+      </dsp:nvSpPr>
+      <dsp:spPr>
+        <a:xfrm>
+          <a:off x="2385419" y="945670"/>
+          <a:ext cx="1536258" cy="1305317"/>
+        </a:xfrm>
+        <a:prstGeom prst="rect">
+          <a:avLst/>
         </a:prstGeom>
         <a:solidFill>
           <a:schemeClr val="dk2">
+            <a:tint val="50000"/>
             <a:hueOff val="0"/>
             <a:satOff val="0"/>
             <a:lumOff val="0"/>
@@ -4706,7 +5130,8 @@
         </a:solidFill>
         <a:ln w="12700" cap="flat" cmpd="sng" algn="ctr">
           <a:solidFill>
-            <a:schemeClr val="lt2">
+            <a:schemeClr val="dk2">
+              <a:shade val="80000"/>
               <a:hueOff val="0"/>
               <a:satOff val="0"/>
               <a:lumOff val="0"/>
@@ -4728,126 +5153,18 @@
         <a:effectRef idx="0">
           <a:scrgbClr r="0" g="0" b="0"/>
         </a:effectRef>
-        <a:fontRef idx="minor">
-          <a:schemeClr val="lt1"/>
-        </a:fontRef>
+        <a:fontRef idx="minor"/>
       </dsp:style>
-      <dsp:txBody>
-        <a:bodyPr spcFirstLastPara="0" vert="horz" wrap="square" lIns="0" tIns="0" rIns="0" bIns="0" numCol="1" spcCol="1270" anchor="ctr" anchorCtr="0">
-          <a:noAutofit/>
-        </a:bodyPr>
-        <a:lstStyle/>
-        <a:p>
-          <a:pPr marL="0" lvl="0" indent="0" algn="ctr" defTabSz="1600200">
-            <a:lnSpc>
-              <a:spcPct val="90000"/>
-            </a:lnSpc>
-            <a:spcBef>
-              <a:spcPct val="0"/>
-            </a:spcBef>
-            <a:spcAft>
-              <a:spcPct val="35000"/>
-            </a:spcAft>
-            <a:buNone/>
-          </a:pPr>
-          <a:endParaRPr lang="en-US" sz="3600" kern="1200"/>
-        </a:p>
-      </dsp:txBody>
-      <dsp:txXfrm rot="-5400000">
-        <a:off x="3391494" y="316331"/>
-        <a:ext cx="1210142" cy="1390969"/>
-      </dsp:txXfrm>
     </dsp:sp>
-    <dsp:sp modelId="{7ADC6D60-6984-934A-82F3-03B7C6EAE1F7}">
-      <dsp:nvSpPr>
-        <dsp:cNvPr id="0" name=""/>
-        <dsp:cNvSpPr/>
-      </dsp:nvSpPr>
-      <dsp:spPr>
-        <a:xfrm rot="5400000">
-          <a:off x="3931901" y="1848013"/>
-          <a:ext cx="2020777" cy="1758076"/>
-        </a:xfrm>
-        <a:prstGeom prst="hexagon">
-          <a:avLst>
-            <a:gd name="adj" fmla="val 25000"/>
-            <a:gd name="vf" fmla="val 115470"/>
-          </a:avLst>
-        </a:prstGeom>
-        <a:solidFill>
-          <a:schemeClr val="dk2">
-            <a:hueOff val="0"/>
-            <a:satOff val="0"/>
-            <a:lumOff val="0"/>
-            <a:alphaOff val="0"/>
-          </a:schemeClr>
-        </a:solidFill>
-        <a:ln w="12700" cap="flat" cmpd="sng" algn="ctr">
-          <a:solidFill>
-            <a:schemeClr val="lt2">
-              <a:hueOff val="0"/>
-              <a:satOff val="0"/>
-              <a:lumOff val="0"/>
-              <a:alphaOff val="0"/>
-            </a:schemeClr>
-          </a:solidFill>
-          <a:prstDash val="solid"/>
-          <a:miter lim="800000"/>
-        </a:ln>
-        <a:effectLst/>
-      </dsp:spPr>
-      <dsp:style>
-        <a:lnRef idx="2">
-          <a:scrgbClr r="0" g="0" b="0"/>
-        </a:lnRef>
-        <a:fillRef idx="1">
-          <a:scrgbClr r="0" g="0" b="0"/>
-        </a:fillRef>
-        <a:effectRef idx="0">
-          <a:scrgbClr r="0" g="0" b="0"/>
-        </a:effectRef>
-        <a:fontRef idx="minor">
-          <a:schemeClr val="lt1"/>
-        </a:fontRef>
-      </dsp:style>
-      <dsp:txBody>
-        <a:bodyPr spcFirstLastPara="0" vert="horz" wrap="square" lIns="60960" tIns="60960" rIns="60960" bIns="60960" numCol="1" spcCol="1270" anchor="ctr" anchorCtr="0">
-          <a:noAutofit/>
-        </a:bodyPr>
-        <a:lstStyle/>
-        <a:p>
-          <a:pPr marL="0" lvl="0" indent="0" algn="ctr" defTabSz="711200">
-            <a:lnSpc>
-              <a:spcPct val="90000"/>
-            </a:lnSpc>
-            <a:spcBef>
-              <a:spcPct val="0"/>
-            </a:spcBef>
-            <a:spcAft>
-              <a:spcPct val="35000"/>
-            </a:spcAft>
-            <a:buNone/>
-          </a:pPr>
-          <a:r>
-            <a:rPr lang="en-US" sz="1600" kern="1200"/>
-            <a:t>UML Diagram</a:t>
-          </a:r>
-        </a:p>
-      </dsp:txBody>
-      <dsp:txXfrm rot="-5400000">
-        <a:off x="4337218" y="2031567"/>
-        <a:ext cx="1210142" cy="1390969"/>
-      </dsp:txXfrm>
-    </dsp:sp>
-    <dsp:sp modelId="{19A1316C-D877-D947-BABA-AA210C2D981A}">
+    <dsp:sp modelId="{C4137255-2FBA-694D-88BB-AC5756B7D79B}">
       <dsp:nvSpPr>
         <dsp:cNvPr id="0" name=""/>
         <dsp:cNvSpPr/>
       </dsp:nvSpPr>
       <dsp:spPr>
         <a:xfrm>
-          <a:off x="1808064" y="2120818"/>
-          <a:ext cx="2182440" cy="1212466"/>
+          <a:off x="2385419" y="2250988"/>
+          <a:ext cx="1536258" cy="542208"/>
         </a:xfrm>
         <a:prstGeom prst="rect">
           <a:avLst/>
@@ -4870,25 +5187,100 @@
         </a:effectRef>
         <a:fontRef idx="minor"/>
       </dsp:style>
+      <dsp:txBody>
+        <a:bodyPr spcFirstLastPara="0" vert="horz" wrap="square" lIns="57150" tIns="57150" rIns="57150" bIns="57150" numCol="1" spcCol="1270" anchor="ctr" anchorCtr="0">
+          <a:noAutofit/>
+        </a:bodyPr>
+        <a:lstStyle/>
+        <a:p>
+          <a:pPr marL="0" lvl="0" indent="0" algn="ctr" defTabSz="666750">
+            <a:lnSpc>
+              <a:spcPct val="90000"/>
+            </a:lnSpc>
+            <a:spcBef>
+              <a:spcPct val="0"/>
+            </a:spcBef>
+            <a:spcAft>
+              <a:spcPct val="35000"/>
+            </a:spcAft>
+            <a:buNone/>
+          </a:pPr>
+          <a:r>
+            <a:rPr lang="en-US" sz="1500" kern="1200" dirty="0"/>
+            <a:t>UML Diagram</a:t>
+          </a:r>
+        </a:p>
+      </dsp:txBody>
+      <dsp:txXfrm>
+        <a:off x="2385419" y="2250988"/>
+        <a:ext cx="1536258" cy="542208"/>
+      </dsp:txXfrm>
     </dsp:sp>
-    <dsp:sp modelId="{AAAFCE80-888C-874A-B15C-E7DC955608FC}">
+    <dsp:sp modelId="{F3FE4700-6A8C-D342-B49E-38000490EDB5}">
       <dsp:nvSpPr>
         <dsp:cNvPr id="0" name=""/>
         <dsp:cNvSpPr/>
       </dsp:nvSpPr>
       <dsp:spPr>
-        <a:xfrm rot="5400000">
-          <a:off x="5830624" y="1848013"/>
-          <a:ext cx="2020777" cy="1758076"/>
+        <a:xfrm>
+          <a:off x="4591987" y="865343"/>
+          <a:ext cx="1706953" cy="2008181"/>
         </a:xfrm>
-        <a:prstGeom prst="hexagon">
-          <a:avLst>
-            <a:gd name="adj" fmla="val 25000"/>
-            <a:gd name="vf" fmla="val 115470"/>
-          </a:avLst>
+        <a:prstGeom prst="rect">
+          <a:avLst/>
+        </a:prstGeom>
+        <a:solidFill>
+          <a:schemeClr val="lt2">
+            <a:alpha val="40000"/>
+            <a:hueOff val="0"/>
+            <a:satOff val="0"/>
+            <a:lumOff val="0"/>
+            <a:alphaOff val="0"/>
+          </a:schemeClr>
+        </a:solidFill>
+        <a:ln w="6350" cap="flat" cmpd="sng" algn="ctr">
+          <a:solidFill>
+            <a:schemeClr val="dk2">
+              <a:hueOff val="0"/>
+              <a:satOff val="0"/>
+              <a:lumOff val="0"/>
+              <a:alphaOff val="0"/>
+            </a:schemeClr>
+          </a:solidFill>
+          <a:prstDash val="solid"/>
+          <a:miter lim="800000"/>
+        </a:ln>
+        <a:effectLst/>
+      </dsp:spPr>
+      <dsp:style>
+        <a:lnRef idx="1">
+          <a:scrgbClr r="0" g="0" b="0"/>
+        </a:lnRef>
+        <a:fillRef idx="1">
+          <a:scrgbClr r="0" g="0" b="0"/>
+        </a:fillRef>
+        <a:effectRef idx="0">
+          <a:scrgbClr r="0" g="0" b="0"/>
+        </a:effectRef>
+        <a:fontRef idx="minor"/>
+      </dsp:style>
+    </dsp:sp>
+    <dsp:sp modelId="{FCADF763-AB2A-714B-8560-A7A5C5DF8AE2}">
+      <dsp:nvSpPr>
+        <dsp:cNvPr id="0" name=""/>
+        <dsp:cNvSpPr/>
+      </dsp:nvSpPr>
+      <dsp:spPr>
+        <a:xfrm>
+          <a:off x="4677335" y="945670"/>
+          <a:ext cx="1536258" cy="1305317"/>
+        </a:xfrm>
+        <a:prstGeom prst="rect">
+          <a:avLst/>
         </a:prstGeom>
         <a:solidFill>
           <a:schemeClr val="dk2">
+            <a:tint val="50000"/>
             <a:hueOff val="0"/>
             <a:satOff val="0"/>
             <a:lumOff val="0"/>
@@ -4897,7 +5289,8 @@
         </a:solidFill>
         <a:ln w="12700" cap="flat" cmpd="sng" algn="ctr">
           <a:solidFill>
-            <a:schemeClr val="lt2">
+            <a:schemeClr val="dk2">
+              <a:shade val="80000"/>
               <a:hueOff val="0"/>
               <a:satOff val="0"/>
               <a:lumOff val="0"/>
@@ -4919,17 +5312,47 @@
         <a:effectRef idx="0">
           <a:scrgbClr r="0" g="0" b="0"/>
         </a:effectRef>
-        <a:fontRef idx="minor">
-          <a:schemeClr val="lt1"/>
-        </a:fontRef>
+        <a:fontRef idx="minor"/>
+      </dsp:style>
+    </dsp:sp>
+    <dsp:sp modelId="{DCD85AD6-7BE0-E04F-9459-49E4206CACC4}">
+      <dsp:nvSpPr>
+        <dsp:cNvPr id="0" name=""/>
+        <dsp:cNvSpPr/>
+      </dsp:nvSpPr>
+      <dsp:spPr>
+        <a:xfrm>
+          <a:off x="4677335" y="2250988"/>
+          <a:ext cx="1536258" cy="542208"/>
+        </a:xfrm>
+        <a:prstGeom prst="rect">
+          <a:avLst/>
+        </a:prstGeom>
+        <a:noFill/>
+        <a:ln>
+          <a:noFill/>
+        </a:ln>
+        <a:effectLst/>
+      </dsp:spPr>
+      <dsp:style>
+        <a:lnRef idx="0">
+          <a:scrgbClr r="0" g="0" b="0"/>
+        </a:lnRef>
+        <a:fillRef idx="0">
+          <a:scrgbClr r="0" g="0" b="0"/>
+        </a:fillRef>
+        <a:effectRef idx="0">
+          <a:scrgbClr r="0" g="0" b="0"/>
+        </a:effectRef>
+        <a:fontRef idx="minor"/>
       </dsp:style>
       <dsp:txBody>
-        <a:bodyPr spcFirstLastPara="0" vert="horz" wrap="square" lIns="0" tIns="0" rIns="0" bIns="0" numCol="1" spcCol="1270" anchor="ctr" anchorCtr="0">
+        <a:bodyPr spcFirstLastPara="0" vert="horz" wrap="square" lIns="57150" tIns="57150" rIns="57150" bIns="57150" numCol="1" spcCol="1270" anchor="ctr" anchorCtr="0">
           <a:noAutofit/>
         </a:bodyPr>
         <a:lstStyle/>
         <a:p>
-          <a:pPr marL="0" lvl="0" indent="0" algn="ctr" defTabSz="1600200">
+          <a:pPr marL="0" lvl="0" indent="0" algn="ctr" defTabSz="666750">
             <a:lnSpc>
               <a:spcPct val="90000"/>
             </a:lnSpc>
@@ -4941,12 +5364,330 @@
             </a:spcAft>
             <a:buNone/>
           </a:pPr>
-          <a:endParaRPr lang="en-US" sz="3600" kern="1200"/>
+          <a:r>
+            <a:rPr lang="en-US" sz="1500" kern="1200" dirty="0"/>
+            <a:t>Sequence Diagram</a:t>
+          </a:r>
         </a:p>
       </dsp:txBody>
-      <dsp:txXfrm rot="-5400000">
-        <a:off x="6235941" y="2031567"/>
-        <a:ext cx="1210142" cy="1390969"/>
+      <dsp:txXfrm>
+        <a:off x="4677335" y="2250988"/>
+        <a:ext cx="1536258" cy="542208"/>
+      </dsp:txXfrm>
+    </dsp:sp>
+    <dsp:sp modelId="{57CF2B79-EB1D-604A-BEB7-42A740286259}">
+      <dsp:nvSpPr>
+        <dsp:cNvPr id="0" name=""/>
+        <dsp:cNvSpPr/>
+      </dsp:nvSpPr>
+      <dsp:spPr>
+        <a:xfrm>
+          <a:off x="6883903" y="865343"/>
+          <a:ext cx="1706953" cy="2008181"/>
+        </a:xfrm>
+        <a:prstGeom prst="rect">
+          <a:avLst/>
+        </a:prstGeom>
+        <a:solidFill>
+          <a:schemeClr val="lt2">
+            <a:alpha val="40000"/>
+            <a:hueOff val="0"/>
+            <a:satOff val="0"/>
+            <a:lumOff val="0"/>
+            <a:alphaOff val="0"/>
+          </a:schemeClr>
+        </a:solidFill>
+        <a:ln w="6350" cap="flat" cmpd="sng" algn="ctr">
+          <a:solidFill>
+            <a:schemeClr val="dk2">
+              <a:hueOff val="0"/>
+              <a:satOff val="0"/>
+              <a:lumOff val="0"/>
+              <a:alphaOff val="0"/>
+            </a:schemeClr>
+          </a:solidFill>
+          <a:prstDash val="solid"/>
+          <a:miter lim="800000"/>
+        </a:ln>
+        <a:effectLst/>
+      </dsp:spPr>
+      <dsp:style>
+        <a:lnRef idx="1">
+          <a:scrgbClr r="0" g="0" b="0"/>
+        </a:lnRef>
+        <a:fillRef idx="1">
+          <a:scrgbClr r="0" g="0" b="0"/>
+        </a:fillRef>
+        <a:effectRef idx="0">
+          <a:scrgbClr r="0" g="0" b="0"/>
+        </a:effectRef>
+        <a:fontRef idx="minor"/>
+      </dsp:style>
+    </dsp:sp>
+    <dsp:sp modelId="{109DE6F6-7C1C-7540-8657-B6EB9BE8B0C4}">
+      <dsp:nvSpPr>
+        <dsp:cNvPr id="0" name=""/>
+        <dsp:cNvSpPr/>
+      </dsp:nvSpPr>
+      <dsp:spPr>
+        <a:xfrm>
+          <a:off x="6969251" y="945670"/>
+          <a:ext cx="1536258" cy="1305317"/>
+        </a:xfrm>
+        <a:prstGeom prst="rect">
+          <a:avLst/>
+        </a:prstGeom>
+        <a:solidFill>
+          <a:schemeClr val="dk2">
+            <a:tint val="50000"/>
+            <a:hueOff val="0"/>
+            <a:satOff val="0"/>
+            <a:lumOff val="0"/>
+            <a:alphaOff val="0"/>
+          </a:schemeClr>
+        </a:solidFill>
+        <a:ln w="12700" cap="flat" cmpd="sng" algn="ctr">
+          <a:solidFill>
+            <a:schemeClr val="dk2">
+              <a:shade val="80000"/>
+              <a:hueOff val="0"/>
+              <a:satOff val="0"/>
+              <a:lumOff val="0"/>
+              <a:alphaOff val="0"/>
+            </a:schemeClr>
+          </a:solidFill>
+          <a:prstDash val="solid"/>
+          <a:miter lim="800000"/>
+        </a:ln>
+        <a:effectLst/>
+      </dsp:spPr>
+      <dsp:style>
+        <a:lnRef idx="2">
+          <a:scrgbClr r="0" g="0" b="0"/>
+        </a:lnRef>
+        <a:fillRef idx="1">
+          <a:scrgbClr r="0" g="0" b="0"/>
+        </a:fillRef>
+        <a:effectRef idx="0">
+          <a:scrgbClr r="0" g="0" b="0"/>
+        </a:effectRef>
+        <a:fontRef idx="minor"/>
+      </dsp:style>
+    </dsp:sp>
+    <dsp:sp modelId="{9CE4DD80-0755-1542-9EE2-732B19A44741}">
+      <dsp:nvSpPr>
+        <dsp:cNvPr id="0" name=""/>
+        <dsp:cNvSpPr/>
+      </dsp:nvSpPr>
+      <dsp:spPr>
+        <a:xfrm>
+          <a:off x="6969251" y="2250988"/>
+          <a:ext cx="1536258" cy="542208"/>
+        </a:xfrm>
+        <a:prstGeom prst="rect">
+          <a:avLst/>
+        </a:prstGeom>
+        <a:noFill/>
+        <a:ln>
+          <a:noFill/>
+        </a:ln>
+        <a:effectLst/>
+      </dsp:spPr>
+      <dsp:style>
+        <a:lnRef idx="0">
+          <a:scrgbClr r="0" g="0" b="0"/>
+        </a:lnRef>
+        <a:fillRef idx="0">
+          <a:scrgbClr r="0" g="0" b="0"/>
+        </a:fillRef>
+        <a:effectRef idx="0">
+          <a:scrgbClr r="0" g="0" b="0"/>
+        </a:effectRef>
+        <a:fontRef idx="minor"/>
+      </dsp:style>
+      <dsp:txBody>
+        <a:bodyPr spcFirstLastPara="0" vert="horz" wrap="square" lIns="57150" tIns="57150" rIns="57150" bIns="57150" numCol="1" spcCol="1270" anchor="ctr" anchorCtr="0">
+          <a:noAutofit/>
+        </a:bodyPr>
+        <a:lstStyle/>
+        <a:p>
+          <a:pPr marL="0" lvl="0" indent="0" algn="ctr" defTabSz="666750">
+            <a:lnSpc>
+              <a:spcPct val="90000"/>
+            </a:lnSpc>
+            <a:spcBef>
+              <a:spcPct val="0"/>
+            </a:spcBef>
+            <a:spcAft>
+              <a:spcPct val="35000"/>
+            </a:spcAft>
+            <a:buNone/>
+          </a:pPr>
+          <a:r>
+            <a:rPr lang="en-US" sz="1500" kern="1200" dirty="0"/>
+            <a:t>High Level Architecture</a:t>
+          </a:r>
+        </a:p>
+      </dsp:txBody>
+      <dsp:txXfrm>
+        <a:off x="6969251" y="2250988"/>
+        <a:ext cx="1536258" cy="542208"/>
+      </dsp:txXfrm>
+    </dsp:sp>
+    <dsp:sp modelId="{36BC6D37-4C3C-124C-AA41-072F9D11EA07}">
+      <dsp:nvSpPr>
+        <dsp:cNvPr id="0" name=""/>
+        <dsp:cNvSpPr/>
+      </dsp:nvSpPr>
+      <dsp:spPr>
+        <a:xfrm>
+          <a:off x="9175819" y="865343"/>
+          <a:ext cx="1706953" cy="2008181"/>
+        </a:xfrm>
+        <a:prstGeom prst="rect">
+          <a:avLst/>
+        </a:prstGeom>
+        <a:solidFill>
+          <a:schemeClr val="lt2">
+            <a:alpha val="40000"/>
+            <a:hueOff val="0"/>
+            <a:satOff val="0"/>
+            <a:lumOff val="0"/>
+            <a:alphaOff val="0"/>
+          </a:schemeClr>
+        </a:solidFill>
+        <a:ln w="6350" cap="flat" cmpd="sng" algn="ctr">
+          <a:solidFill>
+            <a:schemeClr val="dk2">
+              <a:hueOff val="0"/>
+              <a:satOff val="0"/>
+              <a:lumOff val="0"/>
+              <a:alphaOff val="0"/>
+            </a:schemeClr>
+          </a:solidFill>
+          <a:prstDash val="solid"/>
+          <a:miter lim="800000"/>
+        </a:ln>
+        <a:effectLst/>
+      </dsp:spPr>
+      <dsp:style>
+        <a:lnRef idx="1">
+          <a:scrgbClr r="0" g="0" b="0"/>
+        </a:lnRef>
+        <a:fillRef idx="1">
+          <a:scrgbClr r="0" g="0" b="0"/>
+        </a:fillRef>
+        <a:effectRef idx="0">
+          <a:scrgbClr r="0" g="0" b="0"/>
+        </a:effectRef>
+        <a:fontRef idx="minor"/>
+      </dsp:style>
+    </dsp:sp>
+    <dsp:sp modelId="{70FE2A8A-2EA9-B64E-AE77-A3118B0BD28C}">
+      <dsp:nvSpPr>
+        <dsp:cNvPr id="0" name=""/>
+        <dsp:cNvSpPr/>
+      </dsp:nvSpPr>
+      <dsp:spPr>
+        <a:xfrm>
+          <a:off x="9261167" y="945670"/>
+          <a:ext cx="1536258" cy="1305317"/>
+        </a:xfrm>
+        <a:prstGeom prst="rect">
+          <a:avLst/>
+        </a:prstGeom>
+        <a:solidFill>
+          <a:schemeClr val="dk2">
+            <a:tint val="50000"/>
+            <a:hueOff val="0"/>
+            <a:satOff val="0"/>
+            <a:lumOff val="0"/>
+            <a:alphaOff val="0"/>
+          </a:schemeClr>
+        </a:solidFill>
+        <a:ln w="12700" cap="flat" cmpd="sng" algn="ctr">
+          <a:solidFill>
+            <a:schemeClr val="dk2">
+              <a:shade val="80000"/>
+              <a:hueOff val="0"/>
+              <a:satOff val="0"/>
+              <a:lumOff val="0"/>
+              <a:alphaOff val="0"/>
+            </a:schemeClr>
+          </a:solidFill>
+          <a:prstDash val="solid"/>
+          <a:miter lim="800000"/>
+        </a:ln>
+        <a:effectLst/>
+      </dsp:spPr>
+      <dsp:style>
+        <a:lnRef idx="2">
+          <a:scrgbClr r="0" g="0" b="0"/>
+        </a:lnRef>
+        <a:fillRef idx="1">
+          <a:scrgbClr r="0" g="0" b="0"/>
+        </a:fillRef>
+        <a:effectRef idx="0">
+          <a:scrgbClr r="0" g="0" b="0"/>
+        </a:effectRef>
+        <a:fontRef idx="minor"/>
+      </dsp:style>
+    </dsp:sp>
+    <dsp:sp modelId="{0D75C802-F65F-F44B-A676-00B28A1D9E26}">
+      <dsp:nvSpPr>
+        <dsp:cNvPr id="0" name=""/>
+        <dsp:cNvSpPr/>
+      </dsp:nvSpPr>
+      <dsp:spPr>
+        <a:xfrm>
+          <a:off x="9261167" y="2250988"/>
+          <a:ext cx="1536258" cy="542208"/>
+        </a:xfrm>
+        <a:prstGeom prst="rect">
+          <a:avLst/>
+        </a:prstGeom>
+        <a:noFill/>
+        <a:ln>
+          <a:noFill/>
+        </a:ln>
+        <a:effectLst/>
+      </dsp:spPr>
+      <dsp:style>
+        <a:lnRef idx="0">
+          <a:scrgbClr r="0" g="0" b="0"/>
+        </a:lnRef>
+        <a:fillRef idx="0">
+          <a:scrgbClr r="0" g="0" b="0"/>
+        </a:fillRef>
+        <a:effectRef idx="0">
+          <a:scrgbClr r="0" g="0" b="0"/>
+        </a:effectRef>
+        <a:fontRef idx="minor"/>
+      </dsp:style>
+      <dsp:txBody>
+        <a:bodyPr spcFirstLastPara="0" vert="horz" wrap="square" lIns="57150" tIns="57150" rIns="57150" bIns="57150" numCol="1" spcCol="1270" anchor="ctr" anchorCtr="0">
+          <a:noAutofit/>
+        </a:bodyPr>
+        <a:lstStyle/>
+        <a:p>
+          <a:pPr marL="0" lvl="0" indent="0" algn="ctr" defTabSz="666750">
+            <a:lnSpc>
+              <a:spcPct val="90000"/>
+            </a:lnSpc>
+            <a:spcBef>
+              <a:spcPct val="0"/>
+            </a:spcBef>
+            <a:spcAft>
+              <a:spcPct val="35000"/>
+            </a:spcAft>
+            <a:buNone/>
+          </a:pPr>
+          <a:endParaRPr lang="en-US" sz="1500" kern="1200" dirty="0"/>
+        </a:p>
+      </dsp:txBody>
+      <dsp:txXfrm>
+        <a:off x="9261167" y="2250988"/>
+        <a:ext cx="1536258" cy="542208"/>
       </dsp:txXfrm>
     </dsp:sp>
   </dsp:spTree>
@@ -6929,11 +7670,12 @@
 </file>
 
 <file path=ppt/diagrams/layout1.xml><?xml version="1.0" encoding="utf-8"?>
-<dgm:layoutDef xmlns:dgm="http://schemas.openxmlformats.org/drawingml/2006/diagram" xmlns:a="http://schemas.openxmlformats.org/drawingml/2006/main" uniqueId="urn:microsoft.com/office/officeart/2008/layout/AlternatingHexagons">
+<dgm:layoutDef xmlns:dgm="http://schemas.openxmlformats.org/drawingml/2006/diagram" xmlns:a="http://schemas.openxmlformats.org/drawingml/2006/main" uniqueId="urn:microsoft.com/office/officeart/2008/layout/CaptionedPictures">
   <dgm:title val=""/>
   <dgm:desc val=""/>
   <dgm:catLst>
-    <dgm:cat type="list" pri="1500"/>
+    <dgm:cat type="picture" pri="5000"/>
+    <dgm:cat type="pictureconvert" pri="5000"/>
   </dgm:catLst>
   <dgm:sampData>
     <dgm:dataModel>
@@ -6959,11 +7701,11 @@
         </dgm:pt>
       </dgm:ptLst>
       <dgm:cxnLst>
-        <dgm:cxn modelId="40" srcId="0" destId="10" srcOrd="0" destOrd="0"/>
+        <dgm:cxn modelId="60" srcId="0" destId="10" srcOrd="0" destOrd="0"/>
         <dgm:cxn modelId="12" srcId="10" destId="11" srcOrd="0" destOrd="0"/>
-        <dgm:cxn modelId="50" srcId="0" destId="20" srcOrd="1" destOrd="0"/>
+        <dgm:cxn modelId="70" srcId="0" destId="20" srcOrd="1" destOrd="0"/>
         <dgm:cxn modelId="22" srcId="20" destId="21" srcOrd="0" destOrd="0"/>
-        <dgm:cxn modelId="60" srcId="0" destId="30" srcOrd="1" destOrd="0"/>
+        <dgm:cxn modelId="80" srcId="0" destId="30" srcOrd="2" destOrd="0"/>
         <dgm:cxn modelId="32" srcId="30" destId="31" srcOrd="0" destOrd="0"/>
       </dgm:cxnLst>
       <dgm:bg/>
@@ -6977,13 +7719,21 @@
         <dgm:pt modelId="10">
           <dgm:prSet phldr="1"/>
         </dgm:pt>
+        <dgm:pt modelId="11">
+          <dgm:prSet phldr="1"/>
+        </dgm:pt>
         <dgm:pt modelId="20">
+          <dgm:prSet phldr="1"/>
+        </dgm:pt>
+        <dgm:pt modelId="21">
           <dgm:prSet phldr="1"/>
         </dgm:pt>
       </dgm:ptLst>
       <dgm:cxnLst>
         <dgm:cxn modelId="60" srcId="0" destId="10" srcOrd="0" destOrd="0"/>
+        <dgm:cxn modelId="12" srcId="10" destId="11" srcOrd="0" destOrd="0"/>
         <dgm:cxn modelId="70" srcId="0" destId="20" srcOrd="1" destOrd="0"/>
+        <dgm:cxn modelId="22" srcId="20" destId="21" srcOrd="0" destOrd="0"/>
       </dgm:cxnLst>
       <dgm:bg/>
       <dgm:whole/>
@@ -6996,21 +7746,37 @@
         <dgm:pt modelId="10">
           <dgm:prSet phldr="1"/>
         </dgm:pt>
+        <dgm:pt modelId="11">
+          <dgm:prSet phldr="1"/>
+        </dgm:pt>
         <dgm:pt modelId="20">
+          <dgm:prSet phldr="1"/>
+        </dgm:pt>
+        <dgm:pt modelId="21">
           <dgm:prSet phldr="1"/>
         </dgm:pt>
         <dgm:pt modelId="30">
           <dgm:prSet phldr="1"/>
         </dgm:pt>
+        <dgm:pt modelId="31">
+          <dgm:prSet phldr="1"/>
+        </dgm:pt>
         <dgm:pt modelId="40">
+          <dgm:prSet phldr="1"/>
+        </dgm:pt>
+        <dgm:pt modelId="41">
           <dgm:prSet phldr="1"/>
         </dgm:pt>
       </dgm:ptLst>
       <dgm:cxnLst>
         <dgm:cxn modelId="60" srcId="0" destId="10" srcOrd="0" destOrd="0"/>
+        <dgm:cxn modelId="12" srcId="10" destId="11" srcOrd="0" destOrd="0"/>
         <dgm:cxn modelId="70" srcId="0" destId="20" srcOrd="1" destOrd="0"/>
+        <dgm:cxn modelId="22" srcId="20" destId="21" srcOrd="0" destOrd="0"/>
         <dgm:cxn modelId="80" srcId="0" destId="30" srcOrd="2" destOrd="0"/>
+        <dgm:cxn modelId="32" srcId="30" destId="31" srcOrd="0" destOrd="0"/>
         <dgm:cxn modelId="90" srcId="0" destId="40" srcOrd="3" destOrd="0"/>
+        <dgm:cxn modelId="42" srcId="40" destId="41" srcOrd="0" destOrd="0"/>
       </dgm:cxnLst>
       <dgm:bg/>
       <dgm:whole/>
@@ -7021,261 +7787,199 @@
       <dgm:chMax/>
       <dgm:chPref/>
       <dgm:dir/>
-      <dgm:animLvl val="lvl"/>
     </dgm:varLst>
-    <dgm:alg type="lin">
-      <dgm:param type="linDir" val="fromT"/>
-    </dgm:alg>
+    <dgm:choose name="Name1">
+      <dgm:if name="Name2" func="var" arg="dir" op="equ" val="norm">
+        <dgm:alg type="snake">
+          <dgm:param type="off" val="ctr"/>
+        </dgm:alg>
+      </dgm:if>
+      <dgm:else name="Name3">
+        <dgm:alg type="snake">
+          <dgm:param type="grDir" val="tR"/>
+          <dgm:param type="off" val="ctr"/>
+        </dgm:alg>
+      </dgm:else>
+    </dgm:choose>
     <dgm:shape xmlns:r="http://schemas.openxmlformats.org/officeDocument/2006/relationships" r:blip="">
       <dgm:adjLst/>
     </dgm:shape>
     <dgm:constrLst>
-      <dgm:constr type="primFontSz" for="des" forName="Parent1" val="65"/>
-      <dgm:constr type="primFontSz" for="des" forName="Childtext1" refType="primFontSz" refFor="des" refForName="Parent1" op="lte"/>
+      <dgm:constr type="primFontSz" for="des" forName="Parent" op="equ"/>
+      <dgm:constr type="primFontSz" for="des" forName="Child" refType="primFontSz" refFor="des" refForName="Parent" op="lte"/>
       <dgm:constr type="w" for="ch" forName="composite" refType="w"/>
       <dgm:constr type="h" for="ch" forName="composite" refType="h"/>
-      <dgm:constr type="h" for="ch" forName="spaceBetweenRectangles" refType="w" refFor="ch" refForName="composite" fact="-0.042"/>
-      <dgm:constr type="sp" refType="h" refFor="ch" refForName="composite" op="equ" fact="0.1"/>
+      <dgm:constr type="sp" refType="w" refFor="ch" refForName="composite" op="equ" fact="0.1"/>
+      <dgm:constr type="w" for="ch" forName="sibTrans" refType="w" refFor="ch" refForName="composite" op="equ" fact="0.1"/>
+      <dgm:constr type="h" for="ch" forName="sibTrans" refType="w" refFor="ch" refForName="sibTrans" op="equ"/>
     </dgm:constrLst>
     <dgm:forEach name="nodesForEach" axis="ch" ptType="node">
       <dgm:layoutNode name="composite">
+        <dgm:varLst>
+          <dgm:chMax val="1"/>
+          <dgm:chPref val="1"/>
+        </dgm:varLst>
         <dgm:alg type="composite">
-          <dgm:param type="ar" val="3.6"/>
+          <dgm:param type="ar" val="0.85"/>
         </dgm:alg>
         <dgm:shape xmlns:r="http://schemas.openxmlformats.org/officeDocument/2006/relationships" r:blip="">
           <dgm:adjLst/>
         </dgm:shape>
-        <dgm:choose name="Name1">
-          <dgm:if name="Name2" func="var" arg="dir" op="equ" val="norm">
-            <dgm:choose name="Name3">
-              <dgm:if name="Name4" axis="self" ptType="node" func="posOdd" op="equ" val="1">
-                <dgm:constrLst>
-                  <dgm:constr type="l" for="ch" forName="Accent1" refType="w" fact="0.18"/>
-                  <dgm:constr type="t" for="ch" forName="Accent1" refType="h" fact="0"/>
-                  <dgm:constr type="h" for="ch" forName="Accent1" refType="h"/>
-                  <dgm:constr type="w" for="ch" forName="Accent1" refType="h" fact="0.87"/>
-                  <dgm:constr type="l" for="ch" forName="Accent1Text" refType="w" fact="0.18"/>
-                  <dgm:constr type="t" for="ch" forName="Accent1Text" refType="h" fact="0"/>
-                  <dgm:constr type="h" for="ch" forName="Accent1Text" refType="h"/>
-                  <dgm:constr type="w" for="ch" forName="Accent1Text" refType="h" fact="0.87"/>
-                  <dgm:constr type="l" for="ch" forName="Parent1" refType="w" fact="0.441"/>
-                  <dgm:constr type="t" for="ch" forName="Parent1" refType="h" fact="0"/>
-                  <dgm:constr type="h" for="ch" forName="Parent1" refType="h"/>
-                  <dgm:constr type="w" for="ch" forName="Parent1" refType="h" fact="0.87"/>
-                  <dgm:constr type="l" for="ch" forName="Childtext1" refType="w" fact="0.69"/>
-                  <dgm:constr type="t" for="ch" forName="Childtext1" refType="h" fact="0.2"/>
-                  <dgm:constr type="w" for="ch" forName="Childtext1" refType="w" fact="0.31"/>
-                  <dgm:constr type="h" for="ch" forName="Childtext1" refType="h" fact="0.6"/>
-                  <dgm:constr type="l" for="ch" forName="BalanceSpacing" refType="w" fact="0"/>
-                  <dgm:constr type="t" for="ch" forName="BalanceSpacing" refType="h" fact="0"/>
-                  <dgm:constr type="w" for="ch" forName="BalanceSpacing" refType="w"/>
-                  <dgm:constr type="h" for="ch" forName="BalanceSpacing" refType="h" fact="0.1"/>
-                  <dgm:constr type="l" for="ch" forName="BalanceSpacing1" refType="w" fact="0.69"/>
-                  <dgm:constr type="t" for="ch" forName="BalanceSpacing1" refType="h" fact="0.2"/>
-                  <dgm:constr type="w" for="ch" forName="BalanceSpacing1" refType="w" fact="0.31"/>
-                  <dgm:constr type="h" for="ch" forName="BalanceSpacing1" refType="h" fact="0.6"/>
-                </dgm:constrLst>
-              </dgm:if>
-              <dgm:else name="Name5">
-                <dgm:constrLst>
-                  <dgm:constr type="l" for="ch" forName="Accent1" refType="w" fact="0.571"/>
-                  <dgm:constr type="t" for="ch" forName="Accent1" refType="h" fact="0"/>
-                  <dgm:constr type="h" for="ch" forName="Accent1" refType="h"/>
-                  <dgm:constr type="w" for="ch" forName="Accent1" refType="h" fact="0.87"/>
-                  <dgm:constr type="l" for="ch" forName="Accent1Text" refType="w" fact="0.571"/>
-                  <dgm:constr type="t" for="ch" forName="Accent1Text" refType="h" fact="0"/>
-                  <dgm:constr type="h" for="ch" forName="Accent1Text" refType="h"/>
-                  <dgm:constr type="w" for="ch" forName="Accent1Text" refType="h" fact="0.87"/>
-                  <dgm:constr type="l" for="ch" forName="Parent1" refType="w" fact="0.31"/>
-                  <dgm:constr type="t" for="ch" forName="Parent1" refType="h" fact="0"/>
-                  <dgm:constr type="h" for="ch" forName="Parent1" refType="h"/>
-                  <dgm:constr type="w" for="ch" forName="Parent1" refType="h" fact="0.87"/>
-                  <dgm:constr type="l" for="ch" forName="Childtext1" refType="w" fact="0"/>
-                  <dgm:constr type="t" for="ch" forName="Childtext1" refType="h" fact="0.2"/>
-                  <dgm:constr type="w" for="ch" forName="Childtext1" refType="w" fact="0.3"/>
-                  <dgm:constr type="h" for="ch" forName="Childtext1" refType="h" fact="0.6"/>
-                  <dgm:constr type="l" for="ch" forName="BalanceSpacing" refType="w" fact="0.82"/>
-                  <dgm:constr type="t" for="ch" forName="BalanceSpacing" refType="h" fact="0"/>
-                  <dgm:constr type="w" for="ch" forName="BalanceSpacing" refType="w" fact="0.18"/>
-                  <dgm:constr type="h" for="ch" forName="BalanceSpacing" refType="h"/>
-                  <dgm:constr type="l" for="ch" forName="BalanceSpacing1" refType="w" fact="0"/>
-                  <dgm:constr type="t" for="ch" forName="BalanceSpacing1" refType="h" fact="0.2"/>
-                  <dgm:constr type="w" for="ch" forName="BalanceSpacing1" refType="w" fact="0.3"/>
-                  <dgm:constr type="h" for="ch" forName="BalanceSpacing1" refType="h" fact="0.6"/>
-                </dgm:constrLst>
-              </dgm:else>
-            </dgm:choose>
-          </dgm:if>
-          <dgm:else name="Name6">
-            <dgm:choose name="Name7">
-              <dgm:if name="Name8" axis="self" ptType="node" func="posOdd" op="equ" val="1">
-                <dgm:constrLst>
-                  <dgm:constr type="l" for="ch" forName="Accent1" refType="w" fact="0.571"/>
-                  <dgm:constr type="t" for="ch" forName="Accent1" refType="h" fact="0"/>
-                  <dgm:constr type="h" for="ch" forName="Accent1" refType="h"/>
-                  <dgm:constr type="w" for="ch" forName="Accent1" refType="h" fact="0.87"/>
-                  <dgm:constr type="l" for="ch" forName="Accent1Text" refType="w" fact="0.571"/>
-                  <dgm:constr type="t" for="ch" forName="Accent1Text" refType="h" fact="0"/>
-                  <dgm:constr type="h" for="ch" forName="Accent1Text" refType="h"/>
-                  <dgm:constr type="w" for="ch" forName="Accent1Text" refType="h" fact="0.87"/>
-                  <dgm:constr type="l" for="ch" forName="Parent1" refType="w" fact="0.31"/>
-                  <dgm:constr type="t" for="ch" forName="Parent1" refType="h" fact="0"/>
-                  <dgm:constr type="h" for="ch" forName="Parent1" refType="h"/>
-                  <dgm:constr type="w" for="ch" forName="Parent1" refType="h" fact="0.87"/>
-                  <dgm:constr type="l" for="ch" forName="Childtext1" refType="w" fact="0"/>
-                  <dgm:constr type="t" for="ch" forName="Childtext1" refType="h" fact="0.2"/>
-                  <dgm:constr type="w" for="ch" forName="Childtext1" refType="w" fact="0.3"/>
-                  <dgm:constr type="h" for="ch" forName="Childtext1" refType="h" fact="0.6"/>
-                  <dgm:constr type="l" for="ch" forName="BalanceSpacing" refType="w" fact="0.82"/>
-                  <dgm:constr type="t" for="ch" forName="BalanceSpacing" refType="h" fact="0"/>
-                  <dgm:constr type="w" for="ch" forName="BalanceSpacing" refType="w" fact="0.18"/>
-                  <dgm:constr type="h" for="ch" forName="BalanceSpacing" refType="h"/>
-                </dgm:constrLst>
-              </dgm:if>
-              <dgm:else name="Name9">
-                <dgm:constrLst>
-                  <dgm:constr type="l" for="ch" forName="Accent1" refType="w" fact="0.18"/>
-                  <dgm:constr type="t" for="ch" forName="Accent1" refType="h" fact="0"/>
-                  <dgm:constr type="h" for="ch" forName="Accent1" refType="h"/>
-                  <dgm:constr type="w" for="ch" forName="Accent1" refType="h" fact="0.87"/>
-                  <dgm:constr type="l" for="ch" forName="Accent1Text" refType="w" fact="0.18"/>
-                  <dgm:constr type="t" for="ch" forName="Accent1Text" refType="h" fact="0"/>
-                  <dgm:constr type="h" for="ch" forName="Accent1Text" refType="h"/>
-                  <dgm:constr type="w" for="ch" forName="Accent1Text" refType="h" fact="0.87"/>
-                  <dgm:constr type="l" for="ch" forName="Parent1" refType="w" fact="0.441"/>
-                  <dgm:constr type="t" for="ch" forName="Parent1" refType="h" fact="0"/>
-                  <dgm:constr type="h" for="ch" forName="Parent1" refType="h"/>
-                  <dgm:constr type="w" for="ch" forName="Parent1" refType="h" fact="0.87"/>
-                  <dgm:constr type="l" for="ch" forName="Childtext1" refType="w" fact="0.69"/>
-                  <dgm:constr type="t" for="ch" forName="Childtext1" refType="h" fact="0.2"/>
-                  <dgm:constr type="w" for="ch" forName="Childtext1" refType="w" fact="0.31"/>
-                  <dgm:constr type="h" for="ch" forName="Childtext1" refType="h" fact="0.6"/>
-                  <dgm:constr type="l" for="ch" forName="BalanceSpacing" refType="w" fact="0"/>
-                  <dgm:constr type="t" for="ch" forName="BalanceSpacing" refType="h" fact="0"/>
-                  <dgm:constr type="w" for="ch" forName="BalanceSpacing" refType="w" fact="0.18"/>
-                  <dgm:constr type="h" for="ch" forName="BalanceSpacing" refType="h"/>
-                </dgm:constrLst>
-              </dgm:else>
-            </dgm:choose>
-          </dgm:else>
-        </dgm:choose>
-        <dgm:layoutNode name="Parent1" styleLbl="node1">
-          <dgm:varLst>
-            <dgm:chMax val="1"/>
-            <dgm:chPref val="1"/>
-            <dgm:bulletEnabled val="1"/>
-          </dgm:varLst>
-          <dgm:alg type="tx"/>
-          <dgm:shape xmlns:r="http://schemas.openxmlformats.org/officeDocument/2006/relationships" rot="90" type="hexagon" r:blip="">
-            <dgm:adjLst>
-              <dgm:adj idx="1" val="0.25"/>
-              <dgm:adj idx="2" val="1.1547"/>
-            </dgm:adjLst>
-          </dgm:shape>
-          <dgm:presOf axis="self" ptType="node"/>
-          <dgm:constrLst>
-            <dgm:constr type="lMarg" refType="primFontSz" fact="0.3"/>
-            <dgm:constr type="rMarg" refType="primFontSz" fact="0.3"/>
-            <dgm:constr type="tMarg" refType="primFontSz" fact="0.3"/>
-            <dgm:constr type="bMarg" refType="primFontSz" fact="0.3"/>
-          </dgm:constrLst>
-          <dgm:ruleLst>
-            <dgm:rule type="primFontSz" val="5" fact="NaN" max="NaN"/>
-          </dgm:ruleLst>
-        </dgm:layoutNode>
-        <dgm:layoutNode name="Childtext1" styleLbl="revTx">
+        <dgm:constrLst>
+          <dgm:constr type="l" for="ch" forName="Accent" refType="w" fact="0"/>
+          <dgm:constr type="t" for="ch" forName="Accent" refType="h" fact="0"/>
+          <dgm:constr type="w" for="ch" forName="Accent" refType="w"/>
+          <dgm:constr type="h" for="ch" forName="Accent" refType="h"/>
+          <dgm:constr type="l" for="ch" forName="Image" refType="w" fact="0.05"/>
+          <dgm:constr type="t" for="ch" forName="Image" refType="h" fact="0.04"/>
+          <dgm:constr type="w" for="ch" forName="Image" refType="w" fact="0.9"/>
+          <dgm:constr type="h" for="ch" forName="Image" refType="h" fact="0.65"/>
+          <dgm:constr type="l" for="ch" forName="ChildComposite" refType="w" fact="0.05"/>
+          <dgm:constr type="t" for="ch" forName="ChildComposite" refType="h" fact="0.69"/>
+          <dgm:constr type="w" for="ch" forName="ChildComposite" refType="w" fact="0.9"/>
+          <dgm:constr type="h" for="ch" forName="ChildComposite" refType="h" fact="0.27"/>
+        </dgm:constrLst>
+        <dgm:layoutNode name="Accent" styleLbl="trAlignAcc1">
           <dgm:varLst>
             <dgm:chMax val="0"/>
             <dgm:chPref val="0"/>
-            <dgm:bulletEnabled val="1"/>
           </dgm:varLst>
-          <dgm:choose name="Name10">
-            <dgm:if name="Name11" func="var" arg="dir" op="equ" val="norm">
-              <dgm:choose name="Name12">
-                <dgm:if name="Name13" axis="self" ptType="node" func="posOdd" op="equ" val="1">
-                  <dgm:alg type="tx">
-                    <dgm:param type="parTxLTRAlign" val="l"/>
-                  </dgm:alg>
-                </dgm:if>
-                <dgm:else name="Name14">
-                  <dgm:alg type="tx">
-                    <dgm:param type="parTxLTRAlign" val="r"/>
-                  </dgm:alg>
-                </dgm:else>
-              </dgm:choose>
-            </dgm:if>
-            <dgm:else name="Name15">
-              <dgm:choose name="Name16">
-                <dgm:if name="Name17" axis="self" ptType="node" func="posOdd" op="equ" val="1">
-                  <dgm:alg type="tx">
-                    <dgm:param type="parTxLTRAlign" val="r"/>
-                  </dgm:alg>
-                </dgm:if>
-                <dgm:else name="Name18">
-                  <dgm:alg type="tx">
-                    <dgm:param type="parTxLTRAlign" val="l"/>
-                  </dgm:alg>
-                </dgm:else>
-              </dgm:choose>
-            </dgm:else>
-          </dgm:choose>
+          <dgm:alg type="sp"/>
           <dgm:shape xmlns:r="http://schemas.openxmlformats.org/officeDocument/2006/relationships" type="rect" r:blip="">
             <dgm:adjLst/>
           </dgm:shape>
-          <dgm:presOf axis="des" ptType="node"/>
-          <dgm:constrLst>
-            <dgm:constr type="lMarg" refType="primFontSz" fact="0.3"/>
-            <dgm:constr type="rMarg" refType="primFontSz" fact="0.3"/>
-            <dgm:constr type="tMarg" refType="primFontSz" fact="0.3"/>
-            <dgm:constr type="bMarg" refType="primFontSz" fact="0.3"/>
-          </dgm:constrLst>
-          <dgm:ruleLst>
-            <dgm:rule type="primFontSz" val="5" fact="NaN" max="NaN"/>
-          </dgm:ruleLst>
+          <dgm:presOf/>
         </dgm:layoutNode>
-        <dgm:layoutNode name="BalanceSpacing">
+        <dgm:layoutNode name="Image" styleLbl="alignImgPlace1">
+          <dgm:varLst>
+            <dgm:chMax val="0"/>
+            <dgm:chPref val="0"/>
+          </dgm:varLst>
           <dgm:alg type="sp"/>
+          <dgm:shape xmlns:r="http://schemas.openxmlformats.org/officeDocument/2006/relationships" type="rect" r:blip="" blipPhldr="1">
+            <dgm:adjLst/>
+          </dgm:shape>
+          <dgm:presOf/>
+        </dgm:layoutNode>
+        <dgm:layoutNode name="ChildComposite">
+          <dgm:alg type="composite"/>
           <dgm:shape xmlns:r="http://schemas.openxmlformats.org/officeDocument/2006/relationships" r:blip="">
             <dgm:adjLst/>
           </dgm:shape>
-        </dgm:layoutNode>
-        <dgm:layoutNode name="BalanceSpacing1">
-          <dgm:alg type="sp"/>
-          <dgm:shape xmlns:r="http://schemas.openxmlformats.org/officeDocument/2006/relationships" r:blip="">
-            <dgm:adjLst/>
-          </dgm:shape>
-        </dgm:layoutNode>
-        <dgm:forEach name="Name19" axis="followSib" ptType="sibTrans" hideLastTrans="0" cnt="1">
-          <dgm:layoutNode name="Accent1Text" styleLbl="node1">
-            <dgm:alg type="tx"/>
-            <dgm:shape xmlns:r="http://schemas.openxmlformats.org/officeDocument/2006/relationships" rot="90" type="hexagon" r:blip="">
-              <dgm:adjLst>
-                <dgm:adj idx="1" val="0.25"/>
-                <dgm:adj idx="2" val="1.1547"/>
-              </dgm:adjLst>
-            </dgm:shape>
-            <dgm:presOf axis="self" ptType="sibTrans"/>
+          <dgm:choose name="Name4">
+            <dgm:if name="Name5" axis="ch" ptType="node" func="cnt" op="gte" val="1">
+              <dgm:constrLst>
+                <dgm:constr type="l" for="ch" forName="Parent" refType="w" fact="0"/>
+                <dgm:constr type="t" for="ch" forName="Parent" refType="h" fact="0"/>
+                <dgm:constr type="w" for="ch" forName="Parent" refType="w"/>
+                <dgm:constr type="h" for="ch" forName="Parent" refType="h" fact="0.3704"/>
+                <dgm:constr type="l" for="ch" forName="Child" refType="w" fact="0"/>
+                <dgm:constr type="t" for="ch" forName="Child" refType="h" fact="0.3704"/>
+                <dgm:constr type="w" for="ch" forName="Child" refType="w"/>
+                <dgm:constr type="h" for="ch" forName="Child" refType="h" fact="0.6296"/>
+              </dgm:constrLst>
+            </dgm:if>
+            <dgm:else name="Name6">
+              <dgm:constrLst>
+                <dgm:constr type="l" for="ch" forName="Parent" refType="w" fact="0"/>
+                <dgm:constr type="t" for="ch" forName="Parent" refType="h" fact="0"/>
+                <dgm:constr type="w" for="ch" forName="Parent" refType="w"/>
+                <dgm:constr type="h" for="ch" forName="Parent" refType="h"/>
+                <dgm:constr type="l" for="ch" forName="Child" refType="w" fact="0"/>
+                <dgm:constr type="t" for="ch" forName="Child" refType="h" fact="0"/>
+                <dgm:constr type="w" for="ch" forName="Child" refType="w" fact="0"/>
+                <dgm:constr type="h" for="ch" forName="Child" refType="h" fact="0"/>
+              </dgm:constrLst>
+            </dgm:else>
+          </dgm:choose>
+          <dgm:layoutNode name="Child" styleLbl="node1">
+            <dgm:varLst>
+              <dgm:chMax val="0"/>
+              <dgm:chPref val="0"/>
+              <dgm:bulletEnabled val="1"/>
+            </dgm:varLst>
+            <dgm:choose name="Name7">
+              <dgm:if name="Name8" axis="ch" ptType="node" func="cnt" op="gt" val="1">
+                <dgm:alg type="tx">
+                  <dgm:param type="parTxLTRAlign" val="l"/>
+                  <dgm:param type="parTxRTLAlign" val="r"/>
+                  <dgm:param type="txAnchorVert" val="mid"/>
+                  <dgm:param type="txAnchorVertCh" val="mid"/>
+                </dgm:alg>
+              </dgm:if>
+              <dgm:else name="Name9">
+                <dgm:alg type="tx">
+                  <dgm:param type="parTxLTRAlign" val="ctr"/>
+                  <dgm:param type="parTxRTLAlign" val="ctr"/>
+                  <dgm:param type="shpTxLTRAlignCh" val="l"/>
+                  <dgm:param type="shpTxRTLAlignCh" val="r"/>
+                  <dgm:param type="txAnchorVert" val="mid"/>
+                  <dgm:param type="txAnchorVertCh" val="mid"/>
+                </dgm:alg>
+              </dgm:else>
+            </dgm:choose>
+            <dgm:choose name="Name10">
+              <dgm:if name="Name11" axis="ch" ptType="node" func="cnt" op="gte" val="1">
+                <dgm:shape xmlns:r="http://schemas.openxmlformats.org/officeDocument/2006/relationships" type="rect" r:blip="">
+                  <dgm:adjLst/>
+                </dgm:shape>
+              </dgm:if>
+              <dgm:else name="Name12">
+                <dgm:shape xmlns:r="http://schemas.openxmlformats.org/officeDocument/2006/relationships" type="rect" r:blip="" hideGeom="1">
+                  <dgm:adjLst/>
+                </dgm:shape>
+              </dgm:else>
+            </dgm:choose>
+            <dgm:choose name="Name13">
+              <dgm:if name="Name14" axis="ch" ptType="node" func="cnt" op="gte" val="1">
+                <dgm:presOf axis="des" ptType="node"/>
+              </dgm:if>
+              <dgm:else name="Name15">
+                <dgm:presOf/>
+              </dgm:else>
+            </dgm:choose>
             <dgm:constrLst>
-              <dgm:constr type="lMarg"/>
-              <dgm:constr type="rMarg"/>
-              <dgm:constr type="tMarg"/>
-              <dgm:constr type="bMarg"/>
+              <dgm:constr type="lMarg" refType="primFontSz" fact="0.3"/>
+              <dgm:constr type="rMarg" refType="primFontSz" fact="0.3"/>
+              <dgm:constr type="tMarg" refType="primFontSz" fact="0.3"/>
+              <dgm:constr type="bMarg" refType="primFontSz" fact="0.3"/>
             </dgm:constrLst>
             <dgm:ruleLst>
               <dgm:rule type="primFontSz" val="5" fact="NaN" max="NaN"/>
             </dgm:ruleLst>
           </dgm:layoutNode>
-        </dgm:forEach>
+          <dgm:layoutNode name="Parent" styleLbl="revTx">
+            <dgm:varLst>
+              <dgm:chMax val="1"/>
+              <dgm:chPref val="0"/>
+              <dgm:bulletEnabled val="1"/>
+            </dgm:varLst>
+            <dgm:alg type="tx">
+              <dgm:param type="shpTxLTRAlignCh" val="ctr"/>
+              <dgm:param type="txAnchorVert" val="mid"/>
+            </dgm:alg>
+            <dgm:shape xmlns:r="http://schemas.openxmlformats.org/officeDocument/2006/relationships" type="rect" r:blip="">
+              <dgm:adjLst/>
+            </dgm:shape>
+            <dgm:presOf axis="self" ptType="node"/>
+            <dgm:constrLst>
+              <dgm:constr type="lMarg" refType="primFontSz" fact="0.3"/>
+              <dgm:constr type="rMarg" refType="primFontSz" fact="0.3"/>
+              <dgm:constr type="tMarg" refType="primFontSz" fact="0.3"/>
+              <dgm:constr type="bMarg" refType="primFontSz" fact="0.3"/>
+            </dgm:constrLst>
+            <dgm:ruleLst>
+              <dgm:rule type="primFontSz" val="5" fact="NaN" max="NaN"/>
+            </dgm:ruleLst>
+          </dgm:layoutNode>
+        </dgm:layoutNode>
       </dgm:layoutNode>
-      <dgm:forEach name="Name20" axis="followSib" ptType="sibTrans" cnt="1">
-        <dgm:layoutNode name="spaceBetweenRectangles">
+      <dgm:forEach name="sibTransForEach" axis="followSib" ptType="sibTrans" cnt="1">
+        <dgm:layoutNode name="sibTrans">
           <dgm:alg type="sp"/>
           <dgm:shape xmlns:r="http://schemas.openxmlformats.org/officeDocument/2006/relationships" r:blip="">
             <dgm:adjLst/>
           </dgm:shape>
-          <dgm:presOf/>
-          <dgm:constrLst/>
-          <dgm:ruleLst/>
         </dgm:layoutNode>
       </dgm:forEach>
     </dgm:forEach>
@@ -12627,7 +13331,7 @@
           <a:p>
             <a:fld id="{6444479B-705B-4489-957E-7E8A228BDFA0}" type="datetime1">
               <a:rPr lang="en-US" smtClean="0"/>
-              <a:t>7/7/26</a:t>
+              <a:t>7/19/26</a:t>
             </a:fld>
             <a:endParaRPr lang="en-US"/>
           </a:p>
@@ -12827,7 +13531,7 @@
           <a:p>
             <a:fld id="{C07B66AD-7C08-490A-ADA4-B47E10FB2407}" type="datetime1">
               <a:rPr lang="en-US" smtClean="0"/>
-              <a:t>7/7/26</a:t>
+              <a:t>7/19/26</a:t>
             </a:fld>
             <a:endParaRPr lang="en-US"/>
           </a:p>
@@ -13086,7 +13790,7 @@
           <a:p>
             <a:fld id="{05B95027-4255-49E7-9841-CD21BCC99996}" type="datetime1">
               <a:rPr lang="en-US" smtClean="0"/>
-              <a:t>7/7/26</a:t>
+              <a:t>7/19/26</a:t>
             </a:fld>
             <a:endParaRPr lang="en-US"/>
           </a:p>
@@ -13327,7 +14031,7 @@
           <a:p>
             <a:fld id="{9F89F774-3FA6-43B8-9241-99959C8FD463}" type="datetime1">
               <a:rPr lang="en-US" smtClean="0"/>
-              <a:t>7/7/26</a:t>
+              <a:t>7/19/26</a:t>
             </a:fld>
             <a:endParaRPr lang="en-US"/>
           </a:p>
@@ -13654,7 +14358,7 @@
           <a:p>
             <a:fld id="{F9504452-5DCC-4FE2-A5C9-8A5EF6714D65}" type="datetime1">
               <a:rPr lang="en-US" smtClean="0"/>
-              <a:t>7/7/26</a:t>
+              <a:t>7/19/26</a:t>
             </a:fld>
             <a:endParaRPr lang="en-US"/>
           </a:p>
@@ -13964,7 +14668,7 @@
           <a:p>
             <a:fld id="{E579ABC2-0180-4F3A-A895-A85BC724D472}" type="datetime1">
               <a:rPr lang="en-US" smtClean="0"/>
-              <a:t>7/7/26</a:t>
+              <a:t>7/19/26</a:t>
             </a:fld>
             <a:endParaRPr lang="en-US"/>
           </a:p>
@@ -14382,7 +15086,7 @@
           <a:p>
             <a:fld id="{6AEEA9BA-4E8F-439E-BEA4-91FBA01E3F5F}" type="datetime1">
               <a:rPr lang="en-US" smtClean="0"/>
-              <a:t>7/7/26</a:t>
+              <a:t>7/19/26</a:t>
             </a:fld>
             <a:endParaRPr lang="en-US"/>
           </a:p>
@@ -14524,7 +15228,7 @@
           <a:p>
             <a:fld id="{BE15BF18-0007-481C-AA29-413124BC3EE7}" type="datetime1">
               <a:rPr lang="en-US" smtClean="0"/>
-              <a:t>7/7/26</a:t>
+              <a:t>7/19/26</a:t>
             </a:fld>
             <a:endParaRPr lang="en-US"/>
           </a:p>
@@ -14686,7 +15390,7 @@
           <a:p>
             <a:fld id="{09BE9870-3748-43AD-B547-02A075CB4A1D}" type="datetime1">
               <a:rPr lang="en-US" smtClean="0"/>
-              <a:t>7/7/26</a:t>
+              <a:t>7/19/26</a:t>
             </a:fld>
             <a:endParaRPr lang="en-US"/>
           </a:p>
@@ -15003,7 +15707,7 @@
           <a:p>
             <a:fld id="{558E7897-33C5-4F1A-9307-D068E37F3DC7}" type="datetime1">
               <a:rPr lang="en-US" smtClean="0"/>
-              <a:t>7/7/26</a:t>
+              <a:t>7/19/26</a:t>
             </a:fld>
             <a:endParaRPr lang="en-US"/>
           </a:p>
@@ -15298,7 +16002,7 @@
           <a:p>
             <a:fld id="{82E171BA-CC09-47C8-A6DF-F5C5CB59CEEC}" type="datetime1">
               <a:rPr lang="en-US" smtClean="0"/>
-              <a:t>7/7/26</a:t>
+              <a:t>7/19/26</a:t>
             </a:fld>
             <a:endParaRPr lang="en-US"/>
           </a:p>
@@ -15539,7 +16243,7 @@
           <a:p>
             <a:fld id="{7DA38F49-B3E2-4BF0-BEC7-C30D34ABBB8D}" type="datetime1">
               <a:rPr lang="en-US" smtClean="0"/>
-              <a:t>7/7/26</a:t>
+              <a:t>7/19/26</a:t>
             </a:fld>
             <a:endParaRPr lang="en-US"/>
           </a:p>
@@ -16462,6 +17166,78 @@
 </p:sld>
 </file>
 
+<file path=ppt/slides/slide10.xml><?xml version="1.0" encoding="utf-8"?>
+<p:sld xmlns:a="http://schemas.openxmlformats.org/drawingml/2006/main" xmlns:r="http://schemas.openxmlformats.org/officeDocument/2006/relationships" xmlns:p="http://schemas.openxmlformats.org/presentationml/2006/main">
+  <p:cSld>
+    <p:spTree>
+      <p:nvGrpSpPr>
+        <p:cNvPr id="1" name=""/>
+        <p:cNvGrpSpPr/>
+        <p:nvPr/>
+      </p:nvGrpSpPr>
+      <p:grpSpPr>
+        <a:xfrm>
+          <a:off x="0" y="0"/>
+          <a:ext cx="0" cy="0"/>
+          <a:chOff x="0" y="0"/>
+          <a:chExt cx="0" cy="0"/>
+        </a:xfrm>
+      </p:grpSpPr>
+      <p:pic>
+        <p:nvPicPr>
+          <p:cNvPr id="7" name="Content Placeholder 6" descr="A diagram of a car rental system&#10;&#10;AI-generated content may be incorrect.">
+            <a:extLst>
+              <a:ext uri="{FF2B5EF4-FFF2-40B4-BE49-F238E27FC236}">
+                <a16:creationId xmlns:a16="http://schemas.microsoft.com/office/drawing/2014/main" id="{0DCA0108-DA89-D9D2-C1E7-6972429DDD18}"/>
+              </a:ext>
+            </a:extLst>
+          </p:cNvPr>
+          <p:cNvPicPr>
+            <a:picLocks noGrp="1" noChangeAspect="1"/>
+          </p:cNvPicPr>
+          <p:nvPr>
+            <p:ph idx="1"/>
+          </p:nvPr>
+        </p:nvPicPr>
+        <p:blipFill>
+          <a:blip r:embed="rId2"/>
+          <a:stretch>
+            <a:fillRect/>
+          </a:stretch>
+        </p:blipFill>
+        <p:spPr bwMode="auto">
+          <a:xfrm>
+            <a:off x="2303543" y="811531"/>
+            <a:ext cx="7400527" cy="5922534"/>
+          </a:xfrm>
+          <a:prstGeom prst="rect">
+            <a:avLst/>
+          </a:prstGeom>
+          <a:noFill/>
+          <a:extLst>
+            <a:ext uri="{909E8E84-426E-40DD-AFC4-6F175D3DCCD1}">
+              <a14:hiddenFill xmlns:a14="http://schemas.microsoft.com/office/drawing/2010/main">
+                <a:solidFill>
+                  <a:srgbClr val="FFFFFF"/>
+                </a:solidFill>
+              </a14:hiddenFill>
+            </a:ext>
+          </a:extLst>
+        </p:spPr>
+      </p:pic>
+    </p:spTree>
+    <p:extLst>
+      <p:ext uri="{BB962C8B-B14F-4D97-AF65-F5344CB8AC3E}">
+        <p14:creationId xmlns:p14="http://schemas.microsoft.com/office/powerpoint/2010/main" val="1882019923"/>
+      </p:ext>
+    </p:extLst>
+  </p:cSld>
+  <p:clrMapOvr>
+    <a:masterClrMapping/>
+  </p:clrMapOvr>
+</p:sld>
+</file>
+
 <file path=ppt/slides/slide2.xml><?xml version="1.0" encoding="utf-8"?>
 <p:sld xmlns:a="http://schemas.openxmlformats.org/drawingml/2006/main" xmlns:r="http://schemas.openxmlformats.org/officeDocument/2006/relationships" xmlns:p="http://schemas.openxmlformats.org/presentationml/2006/main">
   <p:cSld>
@@ -16662,7 +17438,7 @@
             <p:ph idx="1"/>
             <p:extLst>
               <p:ext uri="{D42A27DB-BD31-4B8C-83A1-F6EECF244321}">
-                <p14:modId xmlns:p14="http://schemas.microsoft.com/office/powerpoint/2010/main" val="2306775565"/>
+                <p14:modId xmlns:p14="http://schemas.microsoft.com/office/powerpoint/2010/main" val="221834360"/>
               </p:ext>
             </p:extLst>
           </p:nvPr>
@@ -18041,6 +18817,309 @@
 </p:sld>
 </file>
 
+<file path=ppt/slides/slide9.xml><?xml version="1.0" encoding="utf-8"?>
+<p:sld xmlns:a="http://schemas.openxmlformats.org/drawingml/2006/main" xmlns:r="http://schemas.openxmlformats.org/officeDocument/2006/relationships" xmlns:p="http://schemas.openxmlformats.org/presentationml/2006/main">
+  <p:cSld>
+    <p:bg>
+      <p:bgPr>
+        <a:solidFill>
+          <a:schemeClr val="bg1"/>
+        </a:solidFill>
+        <a:effectLst/>
+      </p:bgPr>
+    </p:bg>
+    <p:spTree>
+      <p:nvGrpSpPr>
+        <p:cNvPr id="1" name=""/>
+        <p:cNvGrpSpPr/>
+        <p:nvPr/>
+      </p:nvGrpSpPr>
+      <p:grpSpPr>
+        <a:xfrm>
+          <a:off x="0" y="0"/>
+          <a:ext cx="0" cy="0"/>
+          <a:chOff x="0" y="0"/>
+          <a:chExt cx="0" cy="0"/>
+        </a:xfrm>
+      </p:grpSpPr>
+      <p:cxnSp>
+        <p:nvCxnSpPr>
+          <p:cNvPr id="19" name="Straight Connector 18">
+            <a:extLst>
+              <a:ext uri="{FF2B5EF4-FFF2-40B4-BE49-F238E27FC236}">
+                <a16:creationId xmlns:a16="http://schemas.microsoft.com/office/drawing/2014/main" id="{118E06E4-607B-144B-382B-AD3D06B1EE8C}"/>
+              </a:ext>
+              <a:ext uri="{C183D7F6-B498-43B3-948B-1728B52AA6E4}">
+                <adec:decorative xmlns:adec="http://schemas.microsoft.com/office/drawing/2017/decorative" val="1"/>
+              </a:ext>
+            </a:extLst>
+          </p:cNvPr>
+          <p:cNvCxnSpPr>
+            <a:cxnSpLocks noGrp="1" noRot="1" noChangeAspect="1" noMove="1" noResize="1" noEditPoints="1" noAdjustHandles="1" noChangeArrowheads="1" noChangeShapeType="1"/>
+          </p:cNvCxnSpPr>
+          <p:nvPr>
+            <p:extLst>
+              <p:ext uri="{386F3935-93C4-4BCD-93E2-E3B085C9AB24}">
+                <p16:designElem xmlns:p16="http://schemas.microsoft.com/office/powerpoint/2015/main" val="1"/>
+              </p:ext>
+            </p:extLst>
+          </p:nvPr>
+        </p:nvCxnSpPr>
+        <p:spPr>
+          <a:xfrm>
+            <a:off x="713232" y="1031001"/>
+            <a:ext cx="978862" cy="0"/>
+          </a:xfrm>
+          <a:prstGeom prst="line">
+            <a:avLst/>
+          </a:prstGeom>
+          <a:ln w="76200"/>
+        </p:spPr>
+        <p:style>
+          <a:lnRef idx="1">
+            <a:schemeClr val="accent1"/>
+          </a:lnRef>
+          <a:fillRef idx="0">
+            <a:schemeClr val="accent1"/>
+          </a:fillRef>
+          <a:effectRef idx="0">
+            <a:schemeClr val="accent1"/>
+          </a:effectRef>
+          <a:fontRef idx="minor">
+            <a:schemeClr val="tx1"/>
+          </a:fontRef>
+        </p:style>
+      </p:cxnSp>
+      <p:sp useBgFill="1">
+        <p:nvSpPr>
+          <p:cNvPr id="26" name="Rectangle 25">
+            <a:extLst>
+              <a:ext uri="{FF2B5EF4-FFF2-40B4-BE49-F238E27FC236}">
+                <a16:creationId xmlns:a16="http://schemas.microsoft.com/office/drawing/2014/main" id="{149F9F0F-FB8C-5565-247C-BDCC156B5CAF}"/>
+              </a:ext>
+              <a:ext uri="{C183D7F6-B498-43B3-948B-1728B52AA6E4}">
+                <adec:decorative xmlns:adec="http://schemas.microsoft.com/office/drawing/2017/decorative" val="1"/>
+              </a:ext>
+            </a:extLst>
+          </p:cNvPr>
+          <p:cNvSpPr>
+            <a:spLocks noGrp="1" noRot="1" noChangeAspect="1" noMove="1" noResize="1" noEditPoints="1" noAdjustHandles="1" noChangeArrowheads="1" noChangeShapeType="1" noTextEdit="1"/>
+          </p:cNvSpPr>
+          <p:nvPr>
+            <p:extLst>
+              <p:ext uri="{386F3935-93C4-4BCD-93E2-E3B085C9AB24}">
+                <p16:designElem xmlns:p16="http://schemas.microsoft.com/office/powerpoint/2015/main" val="1"/>
+              </p:ext>
+            </p:extLst>
+          </p:nvPr>
+        </p:nvSpPr>
+        <p:spPr>
+          <a:xfrm>
+            <a:off x="0" y="0"/>
+            <a:ext cx="12192000" cy="6858000"/>
+          </a:xfrm>
+          <a:prstGeom prst="rect">
+            <a:avLst/>
+          </a:prstGeom>
+          <a:ln>
+            <a:noFill/>
+          </a:ln>
+        </p:spPr>
+        <p:style>
+          <a:lnRef idx="2">
+            <a:schemeClr val="accent1">
+              <a:shade val="15000"/>
+            </a:schemeClr>
+          </a:lnRef>
+          <a:fillRef idx="1">
+            <a:schemeClr val="accent1"/>
+          </a:fillRef>
+          <a:effectRef idx="0">
+            <a:schemeClr val="accent1"/>
+          </a:effectRef>
+          <a:fontRef idx="minor">
+            <a:schemeClr val="lt1"/>
+          </a:fontRef>
+        </p:style>
+        <p:txBody>
+          <a:bodyPr rtlCol="0" anchor="ctr"/>
+          <a:lstStyle/>
+          <a:p>
+            <a:pPr algn="ctr"/>
+            <a:endParaRPr lang="en-US"/>
+          </a:p>
+        </p:txBody>
+      </p:sp>
+      <p:sp useBgFill="1">
+        <p:nvSpPr>
+          <p:cNvPr id="27" name="Rectangle 26">
+            <a:extLst>
+              <a:ext uri="{FF2B5EF4-FFF2-40B4-BE49-F238E27FC236}">
+                <a16:creationId xmlns:a16="http://schemas.microsoft.com/office/drawing/2014/main" id="{ABA4FDDF-F59C-428B-8603-3A86D75931AB}"/>
+              </a:ext>
+              <a:ext uri="{C183D7F6-B498-43B3-948B-1728B52AA6E4}">
+                <adec:decorative xmlns:adec="http://schemas.microsoft.com/office/drawing/2017/decorative" val="1"/>
+              </a:ext>
+            </a:extLst>
+          </p:cNvPr>
+          <p:cNvSpPr>
+            <a:spLocks noGrp="1" noRot="1" noChangeAspect="1" noMove="1" noResize="1" noEditPoints="1" noAdjustHandles="1" noChangeArrowheads="1" noChangeShapeType="1" noTextEdit="1"/>
+          </p:cNvSpPr>
+          <p:nvPr>
+            <p:extLst>
+              <p:ext uri="{386F3935-93C4-4BCD-93E2-E3B085C9AB24}">
+                <p16:designElem xmlns:p16="http://schemas.microsoft.com/office/powerpoint/2015/main" val="1"/>
+              </p:ext>
+            </p:extLst>
+          </p:nvPr>
+        </p:nvSpPr>
+        <p:spPr>
+          <a:xfrm>
+            <a:off x="0" y="0"/>
+            <a:ext cx="12192000" cy="6858000"/>
+          </a:xfrm>
+          <a:prstGeom prst="rect">
+            <a:avLst/>
+          </a:prstGeom>
+          <a:ln w="12700" cap="flat" cmpd="sng" algn="ctr">
+            <a:noFill/>
+            <a:prstDash val="solid"/>
+            <a:miter lim="800000"/>
+          </a:ln>
+          <a:effectLst/>
+          <a:extLst>
+            <a:ext uri="{91240B29-F687-4F45-9708-019B960494DF}">
+              <a14:hiddenLine xmlns:a14="http://schemas.microsoft.com/office/drawing/2010/main" w="12700" cap="flat" cmpd="sng" algn="ctr">
+                <a:solidFill>
+                  <a:schemeClr val="accent1">
+                    <a:shade val="50000"/>
+                  </a:schemeClr>
+                </a:solidFill>
+                <a:prstDash val="solid"/>
+                <a:miter lim="800000"/>
+              </a14:hiddenLine>
+            </a:ext>
+          </a:extLst>
+        </p:spPr>
+        <p:style>
+          <a:lnRef idx="2">
+            <a:schemeClr val="accent1">
+              <a:shade val="50000"/>
+            </a:schemeClr>
+          </a:lnRef>
+          <a:fillRef idx="1">
+            <a:schemeClr val="accent1"/>
+          </a:fillRef>
+          <a:effectRef idx="0">
+            <a:schemeClr val="accent1"/>
+          </a:effectRef>
+          <a:fontRef idx="minor">
+            <a:schemeClr val="lt1"/>
+          </a:fontRef>
+        </p:style>
+        <p:txBody>
+          <a:bodyPr rtlCol="0" anchor="ctr"/>
+          <a:lstStyle/>
+          <a:p>
+            <a:pPr algn="ctr"/>
+            <a:endParaRPr lang="en-US"/>
+          </a:p>
+        </p:txBody>
+      </p:sp>
+      <p:pic>
+        <p:nvPicPr>
+          <p:cNvPr id="5" name="Content Placeholder 4" descr="A diagram of a car rental system&#10;&#10;AI-generated content may be incorrect.">
+            <a:extLst>
+              <a:ext uri="{FF2B5EF4-FFF2-40B4-BE49-F238E27FC236}">
+                <a16:creationId xmlns:a16="http://schemas.microsoft.com/office/drawing/2014/main" id="{894E4E9B-C0B6-64B0-B1DC-0F3546CEE051}"/>
+              </a:ext>
+            </a:extLst>
+          </p:cNvPr>
+          <p:cNvPicPr>
+            <a:picLocks noGrp="1" noChangeAspect="1"/>
+          </p:cNvPicPr>
+          <p:nvPr>
+            <p:ph idx="1"/>
+          </p:nvPr>
+        </p:nvPicPr>
+        <p:blipFill>
+          <a:blip r:embed="rId2"/>
+          <a:srcRect t="2064" b="13666"/>
+          <a:stretch>
+            <a:fillRect/>
+          </a:stretch>
+        </p:blipFill>
+        <p:spPr>
+          <a:xfrm>
+            <a:off x="1" y="1"/>
+            <a:ext cx="12192000" cy="6857988"/>
+          </a:xfrm>
+          <a:prstGeom prst="rect">
+            <a:avLst/>
+          </a:prstGeom>
+        </p:spPr>
+      </p:pic>
+      <p:cxnSp>
+        <p:nvCxnSpPr>
+          <p:cNvPr id="25" name="Straight Connector 24">
+            <a:extLst>
+              <a:ext uri="{FF2B5EF4-FFF2-40B4-BE49-F238E27FC236}">
+                <a16:creationId xmlns:a16="http://schemas.microsoft.com/office/drawing/2014/main" id="{9AE2764D-E1C7-4C0E-A5A4-12411550ABAD}"/>
+              </a:ext>
+              <a:ext uri="{C183D7F6-B498-43B3-948B-1728B52AA6E4}">
+                <adec:decorative xmlns:adec="http://schemas.microsoft.com/office/drawing/2017/decorative" val="1"/>
+              </a:ext>
+            </a:extLst>
+          </p:cNvPr>
+          <p:cNvCxnSpPr>
+            <a:cxnSpLocks noGrp="1" noRot="1" noChangeAspect="1" noMove="1" noResize="1" noEditPoints="1" noAdjustHandles="1" noChangeArrowheads="1" noChangeShapeType="1"/>
+          </p:cNvCxnSpPr>
+          <p:nvPr>
+            <p:extLst>
+              <p:ext uri="{386F3935-93C4-4BCD-93E2-E3B085C9AB24}">
+                <p16:designElem xmlns:p16="http://schemas.microsoft.com/office/powerpoint/2015/main" val="1"/>
+              </p:ext>
+            </p:extLst>
+          </p:nvPr>
+        </p:nvCxnSpPr>
+        <p:spPr>
+          <a:xfrm>
+            <a:off x="990600" y="1031001"/>
+            <a:ext cx="978862" cy="0"/>
+          </a:xfrm>
+          <a:prstGeom prst="line">
+            <a:avLst/>
+          </a:prstGeom>
+          <a:ln w="76200"/>
+        </p:spPr>
+        <p:style>
+          <a:lnRef idx="1">
+            <a:schemeClr val="accent1"/>
+          </a:lnRef>
+          <a:fillRef idx="0">
+            <a:schemeClr val="accent1"/>
+          </a:fillRef>
+          <a:effectRef idx="0">
+            <a:schemeClr val="accent1"/>
+          </a:effectRef>
+          <a:fontRef idx="minor">
+            <a:schemeClr val="tx1"/>
+          </a:fontRef>
+        </p:style>
+      </p:cxnSp>
+    </p:spTree>
+    <p:extLst>
+      <p:ext uri="{BB962C8B-B14F-4D97-AF65-F5344CB8AC3E}">
+        <p14:creationId xmlns:p14="http://schemas.microsoft.com/office/powerpoint/2010/main" val="4185596605"/>
+      </p:ext>
+    </p:extLst>
+  </p:cSld>
+  <p:clrMapOvr>
+    <a:masterClrMapping/>
+  </p:clrMapOvr>
+</p:sld>
+</file>
+
 <file path=ppt/theme/theme1.xml><?xml version="1.0" encoding="utf-8"?>
 <a:theme xmlns:a="http://schemas.openxmlformats.org/drawingml/2006/main" name="DashVTI">
   <a:themeElements>
